--- a/slides/DeLaRosa_audio_classification_presentation.pptx
+++ b/slides/DeLaRosa_audio_classification_presentation.pptx
@@ -4,6 +4,9 @@
   <p:sldMasterIdLst>
     <p:sldMasterId id="2147483648" r:id="rId1"/>
   </p:sldMasterIdLst>
+  <p:notesMasterIdLst>
+    <p:notesMasterId r:id="rId11"/>
+  </p:notesMasterIdLst>
   <p:sldIdLst>
     <p:sldId id="256" r:id="rId2"/>
     <p:sldId id="257" r:id="rId3"/>
@@ -15,11 +18,8 @@
     <p:sldId id="263" r:id="rId9"/>
     <p:sldId id="264" r:id="rId10"/>
   </p:sldIdLst>
-  <p:notesMasterIdLst>
-    <p:notesMasterId r:id="rId11"/>
-  </p:notesMasterIdLst>
-  <p:sldSz cx="12191695" cy="6858000"/>
-  <p:notesSz cx="6858000" cy="12191695"/>
+  <p:sldSz cx="12192000" cy="6858000"/>
+  <p:notesSz cx="6858000" cy="12192000"/>
   <p:defaultTextStyle>
     <a:lvl1pPr marL="0" algn="l" defTabSz="914400" rtl="0" eaLnBrk="1" latinLnBrk="0" hangingPunct="1">
       <a:defRPr sz="1800" kern="1200">
@@ -112,6 +112,11 @@
       </a:defRPr>
     </a:lvl9pPr>
   </p:defaultTextStyle>
+  <p:extLst>
+    <p:ext uri="{EFAFB233-063F-42B5-8137-9DF3F51BA10A}">
+      <p15:sldGuideLst xmlns:p15="http://schemas.microsoft.com/office/powerpoint/2012/main"/>
+    </p:ext>
+  </p:extLst>
 </p:presentation>
 </file>
 
@@ -137,234 +142,10 @@
           <a:chExt cx="0" cy="0"/>
         </a:xfrm>
       </p:grpSpPr>
-      <p:sp>
-        <p:nvSpPr>
-          <p:cNvPr id="2" name="Header Placeholder 1"/>
-          <p:cNvSpPr>
-            <a:spLocks noGrp="1"/>
-          </p:cNvSpPr>
-          <p:nvPr>
-            <p:ph type="hdr" sz="quarter"/>
-          </p:nvPr>
-        </p:nvSpPr>
-        <p:spPr>
-          <a:xfrm>
-            <a:off x="0" y="0"/>
-            <a:ext cx="2971800" cy="458788"/>
-          </a:xfrm>
-          <a:prstGeom prst="rect">
-            <a:avLst/>
-          </a:prstGeom>
-        </p:spPr>
-        <p:txBody>
-          <a:bodyPr vert="horz" lIns="91440" tIns="45720" rIns="91440" bIns="45720" rtlCol="0"/>
-          <a:lstStyle>
-            <a:lvl1pPr algn="l">
-              <a:defRPr sz="1200"/>
-            </a:lvl1pPr>
-          </a:lstStyle>
-          <a:p>
-            <a:endParaRPr lang="en-US"/>
-          </a:p>
-        </p:txBody>
-      </p:sp>
-      <p:sp>
-        <p:nvSpPr>
-          <p:cNvPr id="3" name="Date Placeholder 2"/>
-          <p:cNvSpPr>
-            <a:spLocks noGrp="1"/>
-          </p:cNvSpPr>
-          <p:nvPr>
-            <p:ph type="dt" idx="1"/>
-          </p:nvPr>
-        </p:nvSpPr>
-        <p:spPr>
-          <a:xfrm>
-            <a:off x="3884613" y="0"/>
-            <a:ext cx="2971800" cy="458788"/>
-          </a:xfrm>
-          <a:prstGeom prst="rect">
-            <a:avLst/>
-          </a:prstGeom>
-        </p:spPr>
-        <p:txBody>
-          <a:bodyPr vert="horz" lIns="91440" tIns="45720" rIns="91440" bIns="45720" rtlCol="0"/>
-          <a:lstStyle>
-            <a:lvl1pPr algn="r">
-              <a:defRPr sz="1200"/>
-            </a:lvl1pPr>
-          </a:lstStyle>
-          <a:p>
-            <a:fld id="{5282F153-3F37-0F45-9E97-73ACFA13230C}" type="datetimeFigureOut">
-              <a:rPr lang="en-US"/>
-              <a:t>7/23/19</a:t>
-            </a:fld>
-            <a:endParaRPr lang="en-US"/>
-          </a:p>
-        </p:txBody>
-      </p:sp>
-      <p:sp>
-        <p:nvSpPr>
-          <p:cNvPr id="4" name="Slide Image Placeholder 3"/>
-          <p:cNvSpPr>
-            <a:spLocks noGrp="1" noRot="1" noChangeAspect="1"/>
-          </p:cNvSpPr>
-          <p:nvPr>
-            <p:ph type="sldImg" idx="2"/>
-          </p:nvPr>
-        </p:nvSpPr>
-        <p:spPr>
-          <a:xfrm>
-            <a:off x="685800" y="1143000"/>
-            <a:ext cx="5486400" cy="3086100"/>
-          </a:xfrm>
-          <a:prstGeom prst="rect">
-            <a:avLst/>
-          </a:prstGeom>
-          <a:noFill/>
-          <a:ln w="12700">
-            <a:solidFill>
-              <a:prstClr val="black"/>
-            </a:solidFill>
-          </a:ln>
-        </p:spPr>
-        <p:txBody>
-          <a:bodyPr vert="horz" lIns="91440" tIns="45720" rIns="91440" bIns="45720" rtlCol="0" anchor="ctr"/>
-          <a:lstStyle/>
-          <a:p>
-            <a:endParaRPr lang="en-US"/>
-          </a:p>
-        </p:txBody>
-      </p:sp>
-      <p:sp>
-        <p:nvSpPr>
-          <p:cNvPr id="5" name="Notes Placeholder 4"/>
-          <p:cNvSpPr>
-            <a:spLocks noGrp="1"/>
-          </p:cNvSpPr>
-          <p:nvPr>
-            <p:ph type="body" sz="quarter" idx="3"/>
-          </p:nvPr>
-        </p:nvSpPr>
-        <p:spPr>
-          <a:xfrm>
-            <a:off x="685800" y="4400550"/>
-            <a:ext cx="5486400" cy="3600450"/>
-          </a:xfrm>
-          <a:prstGeom prst="rect">
-            <a:avLst/>
-          </a:prstGeom>
-        </p:spPr>
-        <p:txBody>
-          <a:bodyPr vert="horz" lIns="91440" tIns="45720" rIns="91440" bIns="45720" rtlCol="0"/>
-          <a:lstStyle/>
-          <a:p>
-            <a:pPr lvl="0"/>
-            <a:r>
-              <a:rPr lang="en-US"/>
-              <a:t>Click to edit Master text styles</a:t>
-            </a:r>
-          </a:p>
-          <a:p>
-            <a:pPr lvl="1"/>
-            <a:r>
-              <a:rPr lang="en-US"/>
-              <a:t>Second level</a:t>
-            </a:r>
-          </a:p>
-          <a:p>
-            <a:pPr lvl="2"/>
-            <a:r>
-              <a:rPr lang="en-US"/>
-              <a:t>Third level</a:t>
-            </a:r>
-          </a:p>
-          <a:p>
-            <a:pPr lvl="3"/>
-            <a:r>
-              <a:rPr lang="en-US"/>
-              <a:t>Fourth level</a:t>
-            </a:r>
-          </a:p>
-          <a:p>
-            <a:pPr lvl="4"/>
-            <a:r>
-              <a:rPr lang="en-US"/>
-              <a:t>Fifth level</a:t>
-            </a:r>
-          </a:p>
-        </p:txBody>
-      </p:sp>
-      <p:sp>
-        <p:nvSpPr>
-          <p:cNvPr id="6" name="Footer Placeholder 5"/>
-          <p:cNvSpPr>
-            <a:spLocks noGrp="1"/>
-          </p:cNvSpPr>
-          <p:nvPr>
-            <p:ph type="ftr" sz="quarter" idx="4"/>
-          </p:nvPr>
-        </p:nvSpPr>
-        <p:spPr>
-          <a:xfrm>
-            <a:off x="0" y="8685213"/>
-            <a:ext cx="2971800" cy="458787"/>
-          </a:xfrm>
-          <a:prstGeom prst="rect">
-            <a:avLst/>
-          </a:prstGeom>
-        </p:spPr>
-        <p:txBody>
-          <a:bodyPr vert="horz" lIns="91440" tIns="45720" rIns="91440" bIns="45720" rtlCol="0" anchor="b"/>
-          <a:lstStyle>
-            <a:lvl1pPr algn="l">
-              <a:defRPr sz="1200"/>
-            </a:lvl1pPr>
-          </a:lstStyle>
-          <a:p>
-            <a:endParaRPr lang="en-US"/>
-          </a:p>
-        </p:txBody>
-      </p:sp>
-      <p:sp>
-        <p:nvSpPr>
-          <p:cNvPr id="7" name="Slide Number Placeholder 6"/>
-          <p:cNvSpPr>
-            <a:spLocks noGrp="1"/>
-          </p:cNvSpPr>
-          <p:nvPr>
-            <p:ph type="sldNum" sz="quarter" idx="5"/>
-          </p:nvPr>
-        </p:nvSpPr>
-        <p:spPr>
-          <a:xfrm>
-            <a:off x="3884613" y="8685213"/>
-            <a:ext cx="2971800" cy="458787"/>
-          </a:xfrm>
-          <a:prstGeom prst="rect">
-            <a:avLst/>
-          </a:prstGeom>
-        </p:spPr>
-        <p:txBody>
-          <a:bodyPr vert="horz" lIns="91440" tIns="45720" rIns="91440" bIns="45720" rtlCol="0" anchor="b"/>
-          <a:lstStyle>
-            <a:lvl1pPr algn="r">
-              <a:defRPr sz="1200"/>
-            </a:lvl1pPr>
-          </a:lstStyle>
-          <a:p>
-            <a:fld id="{CE5E9CC1-C706-0F49-92D6-E571CC5EEA8F}" type="slidenum">
-              <a:rPr lang="en-US"/>
-              <a:t>‹#›</a:t>
-            </a:fld>
-            <a:endParaRPr lang="en-US"/>
-          </a:p>
-        </p:txBody>
-      </p:sp>
     </p:spTree>
     <p:extLst>
       <p:ext uri="{BB962C8B-B14F-4D97-AF65-F5344CB8AC3E}">
-        <p14:creationId xmlns:p14="http://schemas.microsoft.com/office/powerpoint/2010/main" val="1024086991"/>
+        <p14:creationId xmlns:p14="http://schemas.microsoft.com/office/powerpoint/2010/main" val="3261675246"/>
       </p:ext>
     </p:extLst>
   </p:cSld>
@@ -508,10 +289,6 @@
           <a:bodyPr/>
           <a:lstStyle/>
           <a:p>
-            <a:r>
-              <a:rPr lang="en-US" dirty="0"/>
-              <a:t/>
-            </a:r>
             <a:endParaRPr lang="en-US" dirty="0"/>
           </a:p>
         </p:txBody>
@@ -596,10 +373,6 @@
           <a:bodyPr/>
           <a:lstStyle/>
           <a:p>
-            <a:r>
-              <a:rPr lang="en-US" dirty="0"/>
-              <a:t/>
-            </a:r>
             <a:endParaRPr lang="en-US" dirty="0"/>
           </a:p>
         </p:txBody>
@@ -684,10 +457,6 @@
           <a:bodyPr/>
           <a:lstStyle/>
           <a:p>
-            <a:r>
-              <a:rPr lang="en-US" dirty="0"/>
-              <a:t/>
-            </a:r>
             <a:endParaRPr lang="en-US" dirty="0"/>
           </a:p>
         </p:txBody>
@@ -772,10 +541,6 @@
           <a:bodyPr/>
           <a:lstStyle/>
           <a:p>
-            <a:r>
-              <a:rPr lang="en-US" dirty="0"/>
-              <a:t/>
-            </a:r>
             <a:endParaRPr lang="en-US" dirty="0"/>
           </a:p>
         </p:txBody>
@@ -860,10 +625,6 @@
           <a:bodyPr/>
           <a:lstStyle/>
           <a:p>
-            <a:r>
-              <a:rPr lang="en-US" dirty="0"/>
-              <a:t/>
-            </a:r>
             <a:endParaRPr lang="en-US" dirty="0"/>
           </a:p>
         </p:txBody>
@@ -948,10 +709,6 @@
           <a:bodyPr/>
           <a:lstStyle/>
           <a:p>
-            <a:r>
-              <a:rPr lang="en-US" dirty="0"/>
-              <a:t/>
-            </a:r>
             <a:endParaRPr lang="en-US" dirty="0"/>
           </a:p>
         </p:txBody>
@@ -1036,10 +793,6 @@
           <a:bodyPr/>
           <a:lstStyle/>
           <a:p>
-            <a:r>
-              <a:rPr lang="en-US" dirty="0"/>
-              <a:t/>
-            </a:r>
             <a:endParaRPr lang="en-US" dirty="0"/>
           </a:p>
         </p:txBody>
@@ -1124,10 +877,6 @@
           <a:bodyPr/>
           <a:lstStyle/>
           <a:p>
-            <a:r>
-              <a:rPr lang="en-US" dirty="0"/>
-              <a:t/>
-            </a:r>
             <a:endParaRPr lang="en-US" dirty="0"/>
           </a:p>
         </p:txBody>
@@ -1212,10 +961,6 @@
           <a:bodyPr/>
           <a:lstStyle/>
           <a:p>
-            <a:r>
-              <a:rPr lang="en-US" dirty="0"/>
-              <a:t/>
-            </a:r>
             <a:endParaRPr lang="en-US" dirty="0"/>
           </a:p>
         </p:txBody>
@@ -1289,6 +1034,11 @@
 <file path=ppt/slideMasters/slideMaster1.xml><?xml version="1.0" encoding="utf-8"?>
 <p:sldMaster xmlns:a="http://schemas.openxmlformats.org/drawingml/2006/main" xmlns:r="http://schemas.openxmlformats.org/officeDocument/2006/relationships" xmlns:p="http://schemas.openxmlformats.org/presentationml/2006/main">
   <p:cSld>
+    <p:bg>
+      <p:bgRef idx="1001">
+        <a:schemeClr val="bg1"/>
+      </p:bgRef>
+    </p:bg>
     <p:spTree>
       <p:nvGrpSpPr>
         <p:cNvPr id="1" name=""/>
@@ -1571,6 +1321,7 @@
         <a:solidFill>
           <a:srgbClr val="0B1020"/>
         </a:solidFill>
+        <a:effectLst/>
       </p:bgPr>
     </p:bg>
     <p:spTree>
@@ -1611,7 +1362,10 @@
         </p:spPr>
         <p:txBody>
           <a:bodyPr/>
-          <a:p/>
+          <a:lstStyle/>
+          <a:p>
+            <a:endParaRPr/>
+          </a:p>
         </p:txBody>
       </p:sp>
       <p:sp>
@@ -1638,60 +1392,15 @@
         </p:spPr>
         <p:txBody>
           <a:bodyPr/>
-          <a:p/>
+          <a:lstStyle/>
+          <a:p>
+            <a:endParaRPr/>
+          </a:p>
         </p:txBody>
       </p:sp>
       <p:pic>
         <p:nvPicPr>
-          <p:cNvPr id="4" name="Image 0" descr="/mnt/data/audio_outputs/wave_bird.png">    </p:cNvPr>
-          <p:cNvPicPr>
-            <a:picLocks noChangeAspect="1"/>
-          </p:cNvPicPr>
-          <p:nvPr/>
-        </p:nvPicPr>
-        <p:blipFill>
-          <a:blip r:embed="rId1"/>
-          <a:stretch>
-            <a:fillRect/>
-          </a:stretch>
-        </p:blipFill>
-        <p:spPr>
-          <a:xfrm>
-            <a:off x="7127748" y="777240"/>
-            <a:ext cx="3712464" cy="1325880"/>
-          </a:xfrm>
-          <a:prstGeom prst="rect">
-            <a:avLst/>
-          </a:prstGeom>
-        </p:spPr>
-      </p:pic>
-      <p:pic>
-        <p:nvPicPr>
-          <p:cNvPr id="5" name="Image 1" descr="/mnt/data/audio_outputs/wave_cat.png">    </p:cNvPr>
-          <p:cNvPicPr>
-            <a:picLocks noChangeAspect="1"/>
-          </p:cNvPicPr>
-          <p:nvPr/>
-        </p:nvPicPr>
-        <p:blipFill>
-          <a:blip r:embed="rId2"/>
-          <a:stretch>
-            <a:fillRect/>
-          </a:stretch>
-        </p:blipFill>
-        <p:spPr>
-          <a:xfrm>
-            <a:off x="7127748" y="2542032"/>
-            <a:ext cx="3712464" cy="1325880"/>
-          </a:xfrm>
-          <a:prstGeom prst="rect">
-            <a:avLst/>
-          </a:prstGeom>
-        </p:spPr>
-      </p:pic>
-      <p:pic>
-        <p:nvPicPr>
-          <p:cNvPr id="6" name="Image 2" descr="/mnt/data/audio_outputs/wave_dog.png">    </p:cNvPr>
+          <p:cNvPr id="4" name="Image 0" descr="/mnt/data/audio_outputs/wave_bird.png"/>
           <p:cNvPicPr>
             <a:picLocks noChangeAspect="1"/>
           </p:cNvPicPr>
@@ -1705,6 +1414,54 @@
         </p:blipFill>
         <p:spPr>
           <a:xfrm>
+            <a:off x="7127748" y="777240"/>
+            <a:ext cx="3712464" cy="1325880"/>
+          </a:xfrm>
+          <a:prstGeom prst="rect">
+            <a:avLst/>
+          </a:prstGeom>
+        </p:spPr>
+      </p:pic>
+      <p:pic>
+        <p:nvPicPr>
+          <p:cNvPr id="5" name="Image 1" descr="/mnt/data/audio_outputs/wave_cat.png"/>
+          <p:cNvPicPr>
+            <a:picLocks noChangeAspect="1"/>
+          </p:cNvPicPr>
+          <p:nvPr/>
+        </p:nvPicPr>
+        <p:blipFill>
+          <a:blip r:embed="rId4"/>
+          <a:stretch>
+            <a:fillRect/>
+          </a:stretch>
+        </p:blipFill>
+        <p:spPr>
+          <a:xfrm>
+            <a:off x="7127748" y="2542032"/>
+            <a:ext cx="3712464" cy="1325880"/>
+          </a:xfrm>
+          <a:prstGeom prst="rect">
+            <a:avLst/>
+          </a:prstGeom>
+        </p:spPr>
+      </p:pic>
+      <p:pic>
+        <p:nvPicPr>
+          <p:cNvPr id="6" name="Image 2" descr="/mnt/data/audio_outputs/wave_dog.png"/>
+          <p:cNvPicPr>
+            <a:picLocks noChangeAspect="1"/>
+          </p:cNvPicPr>
+          <p:nvPr/>
+        </p:nvPicPr>
+        <p:blipFill>
+          <a:blip r:embed="rId5"/>
+          <a:stretch>
+            <a:fillRect/>
+          </a:stretch>
+        </p:blipFill>
+        <p:spPr>
+          <a:xfrm>
             <a:off x="7127748" y="4315968"/>
             <a:ext cx="3712464" cy="1325880"/>
           </a:xfrm>
@@ -1734,7 +1491,7 @@
           <a:bodyPr wrap="square" lIns="0" tIns="0" rIns="0" bIns="0" rtlCol="0" anchor="ctr"/>
           <a:lstStyle/>
           <a:p>
-            <a:pPr indent="0" marL="0">
+            <a:pPr marL="0" indent="0">
               <a:buNone/>
             </a:pPr>
             <a:r>
@@ -1773,7 +1530,7 @@
           <a:bodyPr wrap="square" lIns="0" tIns="0" rIns="0" bIns="0" rtlCol="0" anchor="ctr"/>
           <a:lstStyle/>
           <a:p>
-            <a:pPr indent="0" marL="0">
+            <a:pPr marL="0" indent="0">
               <a:buNone/>
             </a:pPr>
             <a:r>
@@ -1810,11 +1567,11 @@
         </p:spPr>
         <p:txBody>
           <a:bodyPr wrap="square" lIns="381" tIns="381" rIns="381" bIns="381" rtlCol="0" anchor="ctr">
-            <a:normAutofit/>
+            <a:normAutofit fontScale="92500"/>
           </a:bodyPr>
           <a:lstStyle/>
           <a:p>
-            <a:pPr indent="0" marL="0">
+            <a:pPr marL="0" indent="0">
               <a:buNone/>
             </a:pPr>
             <a:r>
@@ -1850,7 +1607,7 @@
           <a:bodyPr wrap="square" lIns="0" tIns="0" rIns="0" bIns="0" rtlCol="0" anchor="ctr"/>
           <a:lstStyle/>
           <a:p>
-            <a:pPr algn="ctr" indent="0" marL="0">
+            <a:pPr marL="0" indent="0" algn="ctr">
               <a:buNone/>
             </a:pPr>
             <a:r>
@@ -1889,7 +1646,7 @@
           <a:bodyPr wrap="square" lIns="0" tIns="0" rIns="0" bIns="0" rtlCol="0" anchor="ctr"/>
           <a:lstStyle/>
           <a:p>
-            <a:pPr algn="ctr" indent="0" marL="0">
+            <a:pPr marL="0" indent="0" algn="ctr">
               <a:buNone/>
             </a:pPr>
             <a:r>
@@ -1930,7 +1687,10 @@
         </p:spPr>
         <p:txBody>
           <a:bodyPr/>
-          <a:p/>
+          <a:lstStyle/>
+          <a:p>
+            <a:endParaRPr/>
+          </a:p>
         </p:txBody>
       </p:sp>
       <p:sp>
@@ -1954,7 +1714,7 @@
           <a:bodyPr wrap="square" lIns="0" tIns="0" rIns="0" bIns="0" rtlCol="0" anchor="ctr"/>
           <a:lstStyle/>
           <a:p>
-            <a:pPr algn="ctr" indent="0" marL="0">
+            <a:pPr marL="0" indent="0" algn="ctr">
               <a:buNone/>
             </a:pPr>
             <a:r>
@@ -1993,7 +1753,7 @@
           <a:bodyPr wrap="square" lIns="0" tIns="0" rIns="0" bIns="0" rtlCol="0" anchor="ctr"/>
           <a:lstStyle/>
           <a:p>
-            <a:pPr algn="ctr" indent="0" marL="0">
+            <a:pPr marL="0" indent="0" algn="ctr">
               <a:buNone/>
             </a:pPr>
             <a:r>
@@ -2034,7 +1794,10 @@
         </p:spPr>
         <p:txBody>
           <a:bodyPr/>
-          <a:p/>
+          <a:lstStyle/>
+          <a:p>
+            <a:endParaRPr/>
+          </a:p>
         </p:txBody>
       </p:sp>
       <p:sp>
@@ -2058,7 +1821,7 @@
           <a:bodyPr wrap="square" lIns="0" tIns="0" rIns="0" bIns="0" rtlCol="0" anchor="ctr"/>
           <a:lstStyle/>
           <a:p>
-            <a:pPr algn="ctr" indent="0" marL="0">
+            <a:pPr marL="0" indent="0" algn="ctr">
               <a:buNone/>
             </a:pPr>
             <a:r>
@@ -2097,7 +1860,7 @@
           <a:bodyPr wrap="square" lIns="0" tIns="0" rIns="0" bIns="0" rtlCol="0" anchor="ctr"/>
           <a:lstStyle/>
           <a:p>
-            <a:pPr algn="ctr" indent="0" marL="0">
+            <a:pPr marL="0" indent="0" algn="ctr">
               <a:buNone/>
             </a:pPr>
             <a:r>
@@ -2138,7 +1901,10 @@
         </p:spPr>
         <p:txBody>
           <a:bodyPr/>
-          <a:p/>
+          <a:lstStyle/>
+          <a:p>
+            <a:endParaRPr/>
+          </a:p>
         </p:txBody>
       </p:sp>
       <p:sp>
@@ -2163,16 +1929,48 @@
           <a:lstStyle/>
           <a:p>
             <a:r>
+              <a:rPr dirty="0"/>
               <a:t>Presentation: May 6, 2026 • 2–4pm</a:t>
             </a:r>
           </a:p>
           <a:p>
             <a:r>
+              <a:rPr dirty="0"/>
               <a:t>Ethan DeLaRosa</a:t>
             </a:r>
           </a:p>
         </p:txBody>
       </p:sp>
+      <p:pic>
+        <p:nvPicPr>
+          <p:cNvPr id="20" name="Picture 19" descr="Keeping Parrots with Other Pets ...">
+            <a:extLst>
+              <a:ext uri="{FF2B5EF4-FFF2-40B4-BE49-F238E27FC236}">
+                <a16:creationId xmlns:a16="http://schemas.microsoft.com/office/drawing/2014/main" id="{37148FEA-5E60-0272-0C59-3390C77CD244}"/>
+              </a:ext>
+            </a:extLst>
+          </p:cNvPr>
+          <p:cNvPicPr>
+            <a:picLocks noChangeAspect="1"/>
+          </p:cNvPicPr>
+          <p:nvPr/>
+        </p:nvPicPr>
+        <p:blipFill>
+          <a:blip r:embed="rId6"/>
+          <a:stretch>
+            <a:fillRect/>
+          </a:stretch>
+        </p:blipFill>
+        <p:spPr>
+          <a:xfrm>
+            <a:off x="1461871" y="4920615"/>
+            <a:ext cx="2782113" cy="1800225"/>
+          </a:xfrm>
+          <a:prstGeom prst="rect">
+            <a:avLst/>
+          </a:prstGeom>
+        </p:spPr>
+      </p:pic>
     </p:spTree>
   </p:cSld>
   <p:clrMapOvr>
@@ -2189,6 +1987,7 @@
         <a:solidFill>
           <a:srgbClr val="0B1020"/>
         </a:solidFill>
+        <a:effectLst/>
       </p:bgPr>
     </p:bg>
     <p:spTree>
@@ -2229,7 +2028,10 @@
         </p:spPr>
         <p:txBody>
           <a:bodyPr/>
-          <a:p/>
+          <a:lstStyle/>
+          <a:p>
+            <a:endParaRPr/>
+          </a:p>
         </p:txBody>
       </p:sp>
       <p:sp>
@@ -2256,7 +2058,10 @@
         </p:spPr>
         <p:txBody>
           <a:bodyPr/>
-          <a:p/>
+          <a:lstStyle/>
+          <a:p>
+            <a:endParaRPr/>
+          </a:p>
         </p:txBody>
       </p:sp>
       <p:sp>
@@ -2280,7 +2085,7 @@
           <a:bodyPr wrap="square" lIns="0" tIns="0" rIns="0" bIns="0" rtlCol="0" anchor="ctr"/>
           <a:lstStyle/>
           <a:p>
-            <a:pPr indent="0" marL="0">
+            <a:pPr marL="0" indent="0">
               <a:buNone/>
             </a:pPr>
             <a:r>
@@ -2319,7 +2124,7 @@
           <a:bodyPr wrap="square" lIns="0" tIns="0" rIns="0" bIns="0" rtlCol="0" anchor="ctr"/>
           <a:lstStyle/>
           <a:p>
-            <a:pPr indent="0" marL="0">
+            <a:pPr marL="0" indent="0">
               <a:buNone/>
             </a:pPr>
             <a:r>
@@ -2355,7 +2160,7 @@
           <a:bodyPr wrap="square" lIns="0" tIns="0" rIns="0" bIns="0" rtlCol="0" anchor="ctr"/>
           <a:lstStyle/>
           <a:p>
-            <a:pPr algn="r" indent="0" marL="0">
+            <a:pPr marL="0" indent="0" algn="r">
               <a:buNone/>
             </a:pPr>
             <a:r>
@@ -2391,7 +2196,7 @@
           <a:bodyPr wrap="square" lIns="0" tIns="0" rIns="0" bIns="0" rtlCol="0" anchor="ctr"/>
           <a:lstStyle/>
           <a:p>
-            <a:pPr indent="0" marL="0">
+            <a:pPr marL="0" indent="0">
               <a:buNone/>
             </a:pPr>
             <a:r>
@@ -2427,7 +2232,7 @@
           <a:bodyPr wrap="square" lIns="0" tIns="0" rIns="0" bIns="0" rtlCol="0" anchor="ctr"/>
           <a:lstStyle/>
           <a:p>
-            <a:pPr indent="0" marL="0">
+            <a:pPr marL="0" indent="0">
               <a:buNone/>
             </a:pPr>
             <a:r>
@@ -2468,7 +2273,10 @@
         </p:spPr>
         <p:txBody>
           <a:bodyPr/>
-          <a:p/>
+          <a:lstStyle/>
+          <a:p>
+            <a:endParaRPr/>
+          </a:p>
         </p:txBody>
       </p:sp>
       <p:sp>
@@ -2492,7 +2300,7 @@
           <a:bodyPr wrap="square" lIns="0" tIns="0" rIns="0" bIns="0" rtlCol="0" anchor="ctr"/>
           <a:lstStyle/>
           <a:p>
-            <a:pPr indent="0" marL="0">
+            <a:pPr marL="0" indent="0">
               <a:buNone/>
             </a:pPr>
             <a:r>
@@ -2530,7 +2338,7 @@
           </a:bodyPr>
           <a:lstStyle/>
           <a:p>
-            <a:pPr indent="0" marL="0">
+            <a:pPr marL="0" indent="0">
               <a:buNone/>
             </a:pPr>
             <a:r>
@@ -2571,7 +2379,10 @@
         </p:spPr>
         <p:txBody>
           <a:bodyPr/>
-          <a:p/>
+          <a:lstStyle/>
+          <a:p>
+            <a:endParaRPr/>
+          </a:p>
         </p:txBody>
       </p:sp>
       <p:sp>
@@ -2595,7 +2406,7 @@
           <a:bodyPr wrap="square" lIns="0" tIns="0" rIns="0" bIns="0" rtlCol="0" anchor="ctr"/>
           <a:lstStyle/>
           <a:p>
-            <a:pPr indent="0" marL="0">
+            <a:pPr marL="0" indent="0">
               <a:buNone/>
             </a:pPr>
             <a:r>
@@ -2631,7 +2442,7 @@
           <a:bodyPr wrap="square" lIns="0" tIns="0" rIns="0" bIns="0" rtlCol="0" anchor="ctr"/>
           <a:lstStyle/>
           <a:p>
-            <a:pPr indent="0" marL="0">
+            <a:pPr marL="0" indent="0">
               <a:buNone/>
             </a:pPr>
             <a:r>
@@ -2648,14 +2459,14 @@
       </p:sp>
       <p:pic>
         <p:nvPicPr>
-          <p:cNvPr id="15" name="Image 0" descr="/mnt/data/audio_outputs/wave_cat.png">    </p:cNvPr>
+          <p:cNvPr id="15" name="Image 0" descr="/mnt/data/audio_outputs/wave_cat.png"/>
           <p:cNvPicPr>
             <a:picLocks noChangeAspect="1"/>
           </p:cNvPicPr>
           <p:nvPr/>
         </p:nvPicPr>
         <p:blipFill>
-          <a:blip r:embed="rId1"/>
+          <a:blip r:embed="rId3"/>
           <a:stretch>
             <a:fillRect/>
           </a:stretch>
@@ -2693,7 +2504,7 @@
           </a:bodyPr>
           <a:lstStyle/>
           <a:p>
-            <a:pPr indent="0" marL="0">
+            <a:pPr marL="0" indent="0">
               <a:buNone/>
             </a:pPr>
             <a:r>
@@ -2734,7 +2545,10 @@
         </p:spPr>
         <p:txBody>
           <a:bodyPr/>
-          <a:p/>
+          <a:lstStyle/>
+          <a:p>
+            <a:endParaRPr/>
+          </a:p>
         </p:txBody>
       </p:sp>
     </p:spTree>
@@ -2753,6 +2567,7 @@
         <a:solidFill>
           <a:srgbClr val="0B1020"/>
         </a:solidFill>
+        <a:effectLst/>
       </p:bgPr>
     </p:bg>
     <p:spTree>
@@ -2793,7 +2608,10 @@
         </p:spPr>
         <p:txBody>
           <a:bodyPr/>
-          <a:p/>
+          <a:lstStyle/>
+          <a:p>
+            <a:endParaRPr/>
+          </a:p>
         </p:txBody>
       </p:sp>
       <p:sp>
@@ -2820,7 +2638,10 @@
         </p:spPr>
         <p:txBody>
           <a:bodyPr/>
-          <a:p/>
+          <a:lstStyle/>
+          <a:p>
+            <a:endParaRPr/>
+          </a:p>
         </p:txBody>
       </p:sp>
       <p:sp>
@@ -2844,7 +2665,7 @@
           <a:bodyPr wrap="square" lIns="0" tIns="0" rIns="0" bIns="0" rtlCol="0" anchor="ctr"/>
           <a:lstStyle/>
           <a:p>
-            <a:pPr indent="0" marL="0">
+            <a:pPr marL="0" indent="0">
               <a:buNone/>
             </a:pPr>
             <a:r>
@@ -2883,7 +2704,7 @@
           <a:bodyPr wrap="square" lIns="0" tIns="0" rIns="0" bIns="0" rtlCol="0" anchor="ctr"/>
           <a:lstStyle/>
           <a:p>
-            <a:pPr indent="0" marL="0">
+            <a:pPr marL="0" indent="0">
               <a:buNone/>
             </a:pPr>
             <a:r>
@@ -2919,7 +2740,7 @@
           <a:bodyPr wrap="square" lIns="0" tIns="0" rIns="0" bIns="0" rtlCol="0" anchor="ctr"/>
           <a:lstStyle/>
           <a:p>
-            <a:pPr algn="r" indent="0" marL="0">
+            <a:pPr marL="0" indent="0" algn="r">
               <a:buNone/>
             </a:pPr>
             <a:r>
@@ -2936,14 +2757,14 @@
       </p:sp>
       <p:pic>
         <p:nvPicPr>
-          <p:cNvPr id="7" name="Image 0" descr="/mnt/data/audio_outputs/class_balance.png">    </p:cNvPr>
+          <p:cNvPr id="7" name="Image 0" descr="/mnt/data/audio_outputs/class_balance.png"/>
           <p:cNvPicPr>
             <a:picLocks noChangeAspect="1"/>
           </p:cNvPicPr>
           <p:nvPr/>
         </p:nvPicPr>
         <p:blipFill>
-          <a:blip r:embed="rId1"/>
+          <a:blip r:embed="rId3"/>
           <a:stretch>
             <a:fillRect/>
           </a:stretch>
@@ -2979,7 +2800,7 @@
           <a:bodyPr wrap="square" lIns="0" tIns="0" rIns="0" bIns="0" rtlCol="0" anchor="ctr"/>
           <a:lstStyle/>
           <a:p>
-            <a:pPr indent="0" marL="0">
+            <a:pPr marL="0" indent="0">
               <a:buNone/>
             </a:pPr>
             <a:r>
@@ -3017,7 +2838,7 @@
           </a:bodyPr>
           <a:lstStyle/>
           <a:p>
-            <a:pPr indent="0" marL="0">
+            <a:pPr marL="0" indent="0">
               <a:buNone/>
             </a:pPr>
             <a:r>
@@ -3031,7 +2852,7 @@
             <a:endParaRPr lang="en-US" sz="1900" dirty="0"/>
           </a:p>
           <a:p>
-            <a:pPr indent="0" marL="0">
+            <a:pPr marL="0" indent="0">
               <a:buNone/>
             </a:pPr>
             <a:r>
@@ -3045,7 +2866,7 @@
             <a:endParaRPr lang="en-US" sz="1900" dirty="0"/>
           </a:p>
           <a:p>
-            <a:pPr indent="0" marL="0">
+            <a:pPr marL="0" indent="0">
               <a:buNone/>
             </a:pPr>
             <a:r>
@@ -3083,7 +2904,7 @@
           </a:bodyPr>
           <a:lstStyle/>
           <a:p>
-            <a:pPr indent="0" marL="0">
+            <a:pPr marL="0" indent="0">
               <a:buNone/>
             </a:pPr>
             <a:r>
@@ -3119,7 +2940,7 @@
           <a:bodyPr wrap="square" lIns="0" tIns="0" rIns="0" bIns="0" rtlCol="0" anchor="ctr"/>
           <a:lstStyle/>
           <a:p>
-            <a:pPr indent="0" marL="0">
+            <a:pPr marL="0" indent="0">
               <a:buNone/>
             </a:pPr>
             <a:r>
@@ -3150,6 +2971,7 @@
         <a:solidFill>
           <a:srgbClr val="0B1020"/>
         </a:solidFill>
+        <a:effectLst/>
       </p:bgPr>
     </p:bg>
     <p:spTree>
@@ -3190,7 +3012,10 @@
         </p:spPr>
         <p:txBody>
           <a:bodyPr/>
-          <a:p/>
+          <a:lstStyle/>
+          <a:p>
+            <a:endParaRPr/>
+          </a:p>
         </p:txBody>
       </p:sp>
       <p:sp>
@@ -3217,7 +3042,10 @@
         </p:spPr>
         <p:txBody>
           <a:bodyPr/>
-          <a:p/>
+          <a:lstStyle/>
+          <a:p>
+            <a:endParaRPr/>
+          </a:p>
         </p:txBody>
       </p:sp>
       <p:sp>
@@ -3241,7 +3069,7 @@
           <a:bodyPr wrap="square" lIns="0" tIns="0" rIns="0" bIns="0" rtlCol="0" anchor="ctr"/>
           <a:lstStyle/>
           <a:p>
-            <a:pPr indent="0" marL="0">
+            <a:pPr marL="0" indent="0">
               <a:buNone/>
             </a:pPr>
             <a:r>
@@ -3280,7 +3108,7 @@
           <a:bodyPr wrap="square" lIns="0" tIns="0" rIns="0" bIns="0" rtlCol="0" anchor="ctr"/>
           <a:lstStyle/>
           <a:p>
-            <a:pPr indent="0" marL="0">
+            <a:pPr marL="0" indent="0">
               <a:buNone/>
             </a:pPr>
             <a:r>
@@ -3316,7 +3144,7 @@
           <a:bodyPr wrap="square" lIns="0" tIns="0" rIns="0" bIns="0" rtlCol="0" anchor="ctr"/>
           <a:lstStyle/>
           <a:p>
-            <a:pPr algn="r" indent="0" marL="0">
+            <a:pPr marL="0" indent="0" algn="r">
               <a:buNone/>
             </a:pPr>
             <a:r>
@@ -3333,55 +3161,7 @@
       </p:sp>
       <p:pic>
         <p:nvPicPr>
-          <p:cNvPr id="7" name="Image 0" descr="/mnt/data/audio_outputs/wave_dog.png">    </p:cNvPr>
-          <p:cNvPicPr>
-            <a:picLocks noChangeAspect="1"/>
-          </p:cNvPicPr>
-          <p:nvPr/>
-        </p:nvPicPr>
-        <p:blipFill>
-          <a:blip r:embed="rId1"/>
-          <a:stretch>
-            <a:fillRect/>
-          </a:stretch>
-        </p:blipFill>
-        <p:spPr>
-          <a:xfrm>
-            <a:off x="1359713" y="1115568"/>
-            <a:ext cx="3123590" cy="1115568"/>
-          </a:xfrm>
-          <a:prstGeom prst="rect">
-            <a:avLst/>
-          </a:prstGeom>
-        </p:spPr>
-      </p:pic>
-      <p:pic>
-        <p:nvPicPr>
-          <p:cNvPr id="8" name="Image 1" descr="/mnt/data/audio_outputs/wave_bird.png">    </p:cNvPr>
-          <p:cNvPicPr>
-            <a:picLocks noChangeAspect="1"/>
-          </p:cNvPicPr>
-          <p:nvPr/>
-        </p:nvPicPr>
-        <p:blipFill>
-          <a:blip r:embed="rId2"/>
-          <a:stretch>
-            <a:fillRect/>
-          </a:stretch>
-        </p:blipFill>
-        <p:spPr>
-          <a:xfrm>
-            <a:off x="1359713" y="2578608"/>
-            <a:ext cx="3123590" cy="1115568"/>
-          </a:xfrm>
-          <a:prstGeom prst="rect">
-            <a:avLst/>
-          </a:prstGeom>
-        </p:spPr>
-      </p:pic>
-      <p:pic>
-        <p:nvPicPr>
-          <p:cNvPr id="9" name="Image 2" descr="/mnt/data/audio_outputs/wave_cat.png">    </p:cNvPr>
+          <p:cNvPr id="7" name="Image 0" descr="/mnt/data/audio_outputs/wave_dog.png"/>
           <p:cNvPicPr>
             <a:picLocks noChangeAspect="1"/>
           </p:cNvPicPr>
@@ -3395,6 +3175,54 @@
         </p:blipFill>
         <p:spPr>
           <a:xfrm>
+            <a:off x="1359713" y="1115568"/>
+            <a:ext cx="3123590" cy="1115568"/>
+          </a:xfrm>
+          <a:prstGeom prst="rect">
+            <a:avLst/>
+          </a:prstGeom>
+        </p:spPr>
+      </p:pic>
+      <p:pic>
+        <p:nvPicPr>
+          <p:cNvPr id="8" name="Image 1" descr="/mnt/data/audio_outputs/wave_bird.png"/>
+          <p:cNvPicPr>
+            <a:picLocks noChangeAspect="1"/>
+          </p:cNvPicPr>
+          <p:nvPr/>
+        </p:nvPicPr>
+        <p:blipFill>
+          <a:blip r:embed="rId4"/>
+          <a:stretch>
+            <a:fillRect/>
+          </a:stretch>
+        </p:blipFill>
+        <p:spPr>
+          <a:xfrm>
+            <a:off x="1359713" y="2578608"/>
+            <a:ext cx="3123590" cy="1115568"/>
+          </a:xfrm>
+          <a:prstGeom prst="rect">
+            <a:avLst/>
+          </a:prstGeom>
+        </p:spPr>
+      </p:pic>
+      <p:pic>
+        <p:nvPicPr>
+          <p:cNvPr id="9" name="Image 2" descr="/mnt/data/audio_outputs/wave_cat.png"/>
+          <p:cNvPicPr>
+            <a:picLocks noChangeAspect="1"/>
+          </p:cNvPicPr>
+          <p:nvPr/>
+        </p:nvPicPr>
+        <p:blipFill>
+          <a:blip r:embed="rId5"/>
+          <a:stretch>
+            <a:fillRect/>
+          </a:stretch>
+        </p:blipFill>
+        <p:spPr>
+          <a:xfrm>
             <a:off x="1359713" y="4041648"/>
             <a:ext cx="3123590" cy="1115568"/>
           </a:xfrm>
@@ -3424,7 +3252,7 @@
           <a:bodyPr wrap="square" lIns="0" tIns="0" rIns="0" bIns="0" rtlCol="0" anchor="ctr"/>
           <a:lstStyle/>
           <a:p>
-            <a:pPr indent="0" marL="0">
+            <a:pPr marL="0" indent="0">
               <a:buNone/>
             </a:pPr>
             <a:r>
@@ -3544,7 +3372,7 @@
           <a:bodyPr wrap="square" lIns="0" tIns="0" rIns="0" bIns="0" rtlCol="0" anchor="ctr"/>
           <a:lstStyle/>
           <a:p>
-            <a:pPr indent="0" marL="0">
+            <a:pPr marL="0" indent="0">
               <a:buNone/>
             </a:pPr>
             <a:r>
@@ -3582,7 +3410,7 @@
           </a:bodyPr>
           <a:lstStyle/>
           <a:p>
-            <a:pPr indent="0" marL="0">
+            <a:pPr marL="0" indent="0">
               <a:buNone/>
             </a:pPr>
             <a:r>
@@ -3613,6 +3441,7 @@
         <a:solidFill>
           <a:srgbClr val="0B1020"/>
         </a:solidFill>
+        <a:effectLst/>
       </p:bgPr>
     </p:bg>
     <p:spTree>
@@ -3653,7 +3482,10 @@
         </p:spPr>
         <p:txBody>
           <a:bodyPr/>
-          <a:p/>
+          <a:lstStyle/>
+          <a:p>
+            <a:endParaRPr/>
+          </a:p>
         </p:txBody>
       </p:sp>
       <p:sp>
@@ -3680,7 +3512,10 @@
         </p:spPr>
         <p:txBody>
           <a:bodyPr/>
-          <a:p/>
+          <a:lstStyle/>
+          <a:p>
+            <a:endParaRPr/>
+          </a:p>
         </p:txBody>
       </p:sp>
       <p:sp>
@@ -3704,7 +3539,7 @@
           <a:bodyPr wrap="square" lIns="0" tIns="0" rIns="0" bIns="0" rtlCol="0" anchor="ctr"/>
           <a:lstStyle/>
           <a:p>
-            <a:pPr indent="0" marL="0">
+            <a:pPr marL="0" indent="0">
               <a:buNone/>
             </a:pPr>
             <a:r>
@@ -3743,7 +3578,7 @@
           <a:bodyPr wrap="square" lIns="0" tIns="0" rIns="0" bIns="0" rtlCol="0" anchor="ctr"/>
           <a:lstStyle/>
           <a:p>
-            <a:pPr indent="0" marL="0">
+            <a:pPr marL="0" indent="0">
               <a:buNone/>
             </a:pPr>
             <a:r>
@@ -3779,7 +3614,7 @@
           <a:bodyPr wrap="square" lIns="0" tIns="0" rIns="0" bIns="0" rtlCol="0" anchor="ctr"/>
           <a:lstStyle/>
           <a:p>
-            <a:pPr algn="r" indent="0" marL="0">
+            <a:pPr marL="0" indent="0" algn="r">
               <a:buNone/>
             </a:pPr>
             <a:r>
@@ -3820,7 +3655,10 @@
         </p:spPr>
         <p:txBody>
           <a:bodyPr/>
-          <a:p/>
+          <a:lstStyle/>
+          <a:p>
+            <a:endParaRPr/>
+          </a:p>
         </p:txBody>
       </p:sp>
       <p:sp>
@@ -3844,7 +3682,7 @@
           <a:bodyPr wrap="square" lIns="0" tIns="0" rIns="0" bIns="0" rtlCol="0" anchor="ctr"/>
           <a:lstStyle/>
           <a:p>
-            <a:pPr algn="ctr" indent="0" marL="0">
+            <a:pPr marL="0" indent="0" algn="ctr">
               <a:buNone/>
             </a:pPr>
             <a:r>
@@ -3880,7 +3718,7 @@
           <a:bodyPr wrap="square" lIns="0" tIns="0" rIns="0" bIns="0" rtlCol="0" anchor="ctr"/>
           <a:lstStyle/>
           <a:p>
-            <a:pPr algn="ctr" indent="0" marL="0">
+            <a:pPr marL="0" indent="0" algn="ctr">
               <a:buNone/>
             </a:pPr>
             <a:r>
@@ -3918,7 +3756,7 @@
           </a:bodyPr>
           <a:lstStyle/>
           <a:p>
-            <a:pPr algn="ctr" indent="0" marL="0">
+            <a:pPr marL="0" indent="0" algn="ctr">
               <a:buNone/>
             </a:pPr>
             <a:r>
@@ -3959,7 +3797,10 @@
         </p:spPr>
         <p:txBody>
           <a:bodyPr/>
-          <a:p/>
+          <a:lstStyle/>
+          <a:p>
+            <a:endParaRPr/>
+          </a:p>
         </p:txBody>
       </p:sp>
       <p:sp>
@@ -3983,7 +3824,7 @@
           <a:bodyPr wrap="square" lIns="0" tIns="0" rIns="0" bIns="0" rtlCol="0" anchor="ctr"/>
           <a:lstStyle/>
           <a:p>
-            <a:pPr algn="ctr" indent="0" marL="0">
+            <a:pPr marL="0" indent="0" algn="ctr">
               <a:buNone/>
             </a:pPr>
             <a:r>
@@ -4019,7 +3860,7 @@
           <a:bodyPr wrap="square" lIns="0" tIns="0" rIns="0" bIns="0" rtlCol="0" anchor="ctr"/>
           <a:lstStyle/>
           <a:p>
-            <a:pPr algn="ctr" indent="0" marL="0">
+            <a:pPr marL="0" indent="0" algn="ctr">
               <a:buNone/>
             </a:pPr>
             <a:r>
@@ -4033,7 +3874,7 @@
             <a:endParaRPr lang="en-US" sz="1700" dirty="0"/>
           </a:p>
           <a:p>
-            <a:pPr algn="ctr" indent="0" marL="0">
+            <a:pPr marL="0" indent="0" algn="ctr">
               <a:buNone/>
             </a:pPr>
             <a:r>
@@ -4071,7 +3912,7 @@
           </a:bodyPr>
           <a:lstStyle/>
           <a:p>
-            <a:pPr algn="ctr" indent="0" marL="0">
+            <a:pPr marL="0" indent="0" algn="ctr">
               <a:buNone/>
             </a:pPr>
             <a:r>
@@ -4112,7 +3953,10 @@
         </p:spPr>
         <p:txBody>
           <a:bodyPr/>
-          <a:p/>
+          <a:lstStyle/>
+          <a:p>
+            <a:endParaRPr/>
+          </a:p>
         </p:txBody>
       </p:sp>
       <p:sp>
@@ -4136,7 +3980,7 @@
           <a:bodyPr wrap="square" lIns="0" tIns="0" rIns="0" bIns="0" rtlCol="0" anchor="ctr"/>
           <a:lstStyle/>
           <a:p>
-            <a:pPr algn="ctr" indent="0" marL="0">
+            <a:pPr marL="0" indent="0" algn="ctr">
               <a:buNone/>
             </a:pPr>
             <a:r>
@@ -4172,7 +4016,7 @@
           <a:bodyPr wrap="square" lIns="0" tIns="0" rIns="0" bIns="0" rtlCol="0" anchor="ctr"/>
           <a:lstStyle/>
           <a:p>
-            <a:pPr algn="ctr" indent="0" marL="0">
+            <a:pPr marL="0" indent="0" algn="ctr">
               <a:buNone/>
             </a:pPr>
             <a:r>
@@ -4186,7 +4030,7 @@
             <a:endParaRPr lang="en-US" sz="1700" dirty="0"/>
           </a:p>
           <a:p>
-            <a:pPr algn="ctr" indent="0" marL="0">
+            <a:pPr marL="0" indent="0" algn="ctr">
               <a:buNone/>
             </a:pPr>
             <a:r>
@@ -4224,7 +4068,7 @@
           </a:bodyPr>
           <a:lstStyle/>
           <a:p>
-            <a:pPr algn="ctr" indent="0" marL="0">
+            <a:pPr marL="0" indent="0" algn="ctr">
               <a:buNone/>
             </a:pPr>
             <a:r>
@@ -4265,7 +4109,10 @@
         </p:spPr>
         <p:txBody>
           <a:bodyPr/>
-          <a:p/>
+          <a:lstStyle/>
+          <a:p>
+            <a:endParaRPr/>
+          </a:p>
         </p:txBody>
       </p:sp>
       <p:sp>
@@ -4289,7 +4136,7 @@
           <a:bodyPr wrap="square" lIns="0" tIns="0" rIns="0" bIns="0" rtlCol="0" anchor="ctr"/>
           <a:lstStyle/>
           <a:p>
-            <a:pPr algn="ctr" indent="0" marL="0">
+            <a:pPr marL="0" indent="0" algn="ctr">
               <a:buNone/>
             </a:pPr>
             <a:r>
@@ -4325,7 +4172,7 @@
           <a:bodyPr wrap="square" lIns="0" tIns="0" rIns="0" bIns="0" rtlCol="0" anchor="ctr"/>
           <a:lstStyle/>
           <a:p>
-            <a:pPr algn="ctr" indent="0" marL="0">
+            <a:pPr marL="0" indent="0" algn="ctr">
               <a:buNone/>
             </a:pPr>
             <a:r>
@@ -4363,7 +4210,7 @@
           </a:bodyPr>
           <a:lstStyle/>
           <a:p>
-            <a:pPr algn="ctr" indent="0" marL="0">
+            <a:pPr marL="0" indent="0" algn="ctr">
               <a:buNone/>
             </a:pPr>
             <a:r>
@@ -4404,7 +4251,10 @@
         </p:spPr>
         <p:txBody>
           <a:bodyPr/>
-          <a:p/>
+          <a:lstStyle/>
+          <a:p>
+            <a:endParaRPr/>
+          </a:p>
         </p:txBody>
       </p:sp>
       <p:sp>
@@ -4428,7 +4278,7 @@
           <a:bodyPr wrap="square" lIns="0" tIns="0" rIns="0" bIns="0" rtlCol="0" anchor="ctr"/>
           <a:lstStyle/>
           <a:p>
-            <a:pPr algn="ctr" indent="0" marL="0">
+            <a:pPr marL="0" indent="0" algn="ctr">
               <a:buNone/>
             </a:pPr>
             <a:r>
@@ -4464,7 +4314,7 @@
           <a:bodyPr wrap="square" lIns="0" tIns="0" rIns="0" bIns="0" rtlCol="0" anchor="ctr"/>
           <a:lstStyle/>
           <a:p>
-            <a:pPr algn="ctr" indent="0" marL="0">
+            <a:pPr marL="0" indent="0" algn="ctr">
               <a:buNone/>
             </a:pPr>
             <a:r>
@@ -4478,7 +4328,7 @@
             <a:endParaRPr lang="en-US" sz="1700" dirty="0"/>
           </a:p>
           <a:p>
-            <a:pPr algn="ctr" indent="0" marL="0">
+            <a:pPr marL="0" indent="0" algn="ctr">
               <a:buNone/>
             </a:pPr>
             <a:r>
@@ -4516,7 +4366,7 @@
           </a:bodyPr>
           <a:lstStyle/>
           <a:p>
-            <a:pPr algn="ctr" indent="0" marL="0">
+            <a:pPr marL="0" indent="0" algn="ctr">
               <a:buNone/>
             </a:pPr>
             <a:r>
@@ -4554,7 +4404,7 @@
           </a:bodyPr>
           <a:lstStyle/>
           <a:p>
-            <a:pPr indent="0" marL="0">
+            <a:pPr marL="0" indent="0">
               <a:buNone/>
             </a:pPr>
             <a:r>
@@ -4585,6 +4435,7 @@
         <a:solidFill>
           <a:srgbClr val="0B1020"/>
         </a:solidFill>
+        <a:effectLst/>
       </p:bgPr>
     </p:bg>
     <p:spTree>
@@ -4625,7 +4476,10 @@
         </p:spPr>
         <p:txBody>
           <a:bodyPr/>
-          <a:p/>
+          <a:lstStyle/>
+          <a:p>
+            <a:endParaRPr/>
+          </a:p>
         </p:txBody>
       </p:sp>
       <p:sp>
@@ -4652,7 +4506,10 @@
         </p:spPr>
         <p:txBody>
           <a:bodyPr/>
-          <a:p/>
+          <a:lstStyle/>
+          <a:p>
+            <a:endParaRPr/>
+          </a:p>
         </p:txBody>
       </p:sp>
       <p:sp>
@@ -4676,7 +4533,7 @@
           <a:bodyPr wrap="square" lIns="0" tIns="0" rIns="0" bIns="0" rtlCol="0" anchor="ctr"/>
           <a:lstStyle/>
           <a:p>
-            <a:pPr indent="0" marL="0">
+            <a:pPr marL="0" indent="0">
               <a:buNone/>
             </a:pPr>
             <a:r>
@@ -4715,7 +4572,7 @@
           <a:bodyPr wrap="square" lIns="0" tIns="0" rIns="0" bIns="0" rtlCol="0" anchor="ctr"/>
           <a:lstStyle/>
           <a:p>
-            <a:pPr indent="0" marL="0">
+            <a:pPr marL="0" indent="0">
               <a:buNone/>
             </a:pPr>
             <a:r>
@@ -4751,7 +4608,7 @@
           <a:bodyPr wrap="square" lIns="0" tIns="0" rIns="0" bIns="0" rtlCol="0" anchor="ctr"/>
           <a:lstStyle/>
           <a:p>
-            <a:pPr algn="r" indent="0" marL="0">
+            <a:pPr marL="0" indent="0" algn="r">
               <a:buNone/>
             </a:pPr>
             <a:r>
@@ -4768,14 +4625,14 @@
       </p:sp>
       <p:pic>
         <p:nvPicPr>
-          <p:cNvPr id="7" name="Image 0" descr="/mnt/data/audio_outputs/model_accuracy.png">    </p:cNvPr>
+          <p:cNvPr id="7" name="Image 0" descr="/mnt/data/audio_outputs/model_accuracy.png"/>
           <p:cNvPicPr>
             <a:picLocks noChangeAspect="1"/>
           </p:cNvPicPr>
           <p:nvPr/>
         </p:nvPicPr>
         <p:blipFill>
-          <a:blip r:embed="rId1"/>
+          <a:blip r:embed="rId3"/>
           <a:stretch>
             <a:fillRect/>
           </a:stretch>
@@ -4811,7 +4668,7 @@
           <a:bodyPr wrap="square" lIns="0" tIns="0" rIns="0" bIns="0" rtlCol="0" anchor="ctr"/>
           <a:lstStyle/>
           <a:p>
-            <a:pPr indent="0" marL="0">
+            <a:pPr marL="0" indent="0">
               <a:buNone/>
             </a:pPr>
             <a:r>
@@ -4847,7 +4704,7 @@
           <a:bodyPr wrap="square" lIns="0" tIns="0" rIns="0" bIns="0" rtlCol="0" anchor="ctr"/>
           <a:lstStyle/>
           <a:p>
-            <a:pPr algn="ctr" indent="0" marL="0">
+            <a:pPr marL="0" indent="0" algn="ctr">
               <a:buNone/>
             </a:pPr>
             <a:r>
@@ -4886,7 +4743,7 @@
           <a:bodyPr wrap="square" lIns="0" tIns="0" rIns="0" bIns="0" rtlCol="0" anchor="ctr"/>
           <a:lstStyle/>
           <a:p>
-            <a:pPr algn="ctr" indent="0" marL="0">
+            <a:pPr marL="0" indent="0" algn="ctr">
               <a:buNone/>
             </a:pPr>
             <a:r>
@@ -4927,7 +4784,10 @@
         </p:spPr>
         <p:txBody>
           <a:bodyPr/>
-          <a:p/>
+          <a:lstStyle/>
+          <a:p>
+            <a:endParaRPr/>
+          </a:p>
         </p:txBody>
       </p:sp>
       <p:sp>
@@ -4951,7 +4811,7 @@
           <a:bodyPr wrap="square" lIns="0" tIns="0" rIns="0" bIns="0" rtlCol="0" anchor="ctr"/>
           <a:lstStyle/>
           <a:p>
-            <a:pPr algn="ctr" indent="0" marL="0">
+            <a:pPr marL="0" indent="0" algn="ctr">
               <a:buNone/>
             </a:pPr>
             <a:r>
@@ -4990,7 +4850,7 @@
           <a:bodyPr wrap="square" lIns="0" tIns="0" rIns="0" bIns="0" rtlCol="0" anchor="ctr"/>
           <a:lstStyle/>
           <a:p>
-            <a:pPr algn="ctr" indent="0" marL="0">
+            <a:pPr marL="0" indent="0" algn="ctr">
               <a:buNone/>
             </a:pPr>
             <a:r>
@@ -5031,7 +4891,10 @@
         </p:spPr>
         <p:txBody>
           <a:bodyPr/>
-          <a:p/>
+          <a:lstStyle/>
+          <a:p>
+            <a:endParaRPr/>
+          </a:p>
         </p:txBody>
       </p:sp>
       <p:sp>
@@ -5055,7 +4918,7 @@
           <a:bodyPr wrap="square" lIns="0" tIns="0" rIns="0" bIns="0" rtlCol="0" anchor="ctr"/>
           <a:lstStyle/>
           <a:p>
-            <a:pPr algn="ctr" indent="0" marL="0">
+            <a:pPr marL="0" indent="0" algn="ctr">
               <a:buNone/>
             </a:pPr>
             <a:r>
@@ -5094,7 +4957,7 @@
           <a:bodyPr wrap="square" lIns="0" tIns="0" rIns="0" bIns="0" rtlCol="0" anchor="ctr"/>
           <a:lstStyle/>
           <a:p>
-            <a:pPr algn="ctr" indent="0" marL="0">
+            <a:pPr marL="0" indent="0" algn="ctr">
               <a:buNone/>
             </a:pPr>
             <a:r>
@@ -5135,7 +4998,10 @@
         </p:spPr>
         <p:txBody>
           <a:bodyPr/>
-          <a:p/>
+          <a:lstStyle/>
+          <a:p>
+            <a:endParaRPr/>
+          </a:p>
         </p:txBody>
       </p:sp>
       <p:sp>
@@ -5159,7 +5025,7 @@
           <a:bodyPr wrap="square" lIns="0" tIns="0" rIns="0" bIns="0" rtlCol="0" anchor="ctr"/>
           <a:lstStyle/>
           <a:p>
-            <a:pPr indent="0" marL="0">
+            <a:pPr marL="0" indent="0">
               <a:buNone/>
             </a:pPr>
             <a:r>
@@ -5195,7 +5061,7 @@
           <a:bodyPr wrap="square" lIns="0" tIns="0" rIns="0" bIns="0" rtlCol="0" anchor="ctr"/>
           <a:lstStyle/>
           <a:p>
-            <a:pPr algn="r" indent="0" marL="0">
+            <a:pPr marL="0" indent="0" algn="r">
               <a:buNone/>
             </a:pPr>
             <a:r>
@@ -5231,7 +5097,7 @@
           <a:bodyPr wrap="square" lIns="0" tIns="0" rIns="0" bIns="0" rtlCol="0" anchor="ctr"/>
           <a:lstStyle/>
           <a:p>
-            <a:pPr algn="r" indent="0" marL="0">
+            <a:pPr marL="0" indent="0" algn="r">
               <a:buNone/>
             </a:pPr>
             <a:r>
@@ -5267,7 +5133,7 @@
           <a:bodyPr wrap="square" lIns="0" tIns="0" rIns="0" bIns="0" rtlCol="0" anchor="ctr"/>
           <a:lstStyle/>
           <a:p>
-            <a:pPr algn="r" indent="0" marL="0">
+            <a:pPr marL="0" indent="0" algn="r">
               <a:buNone/>
             </a:pPr>
             <a:r>
@@ -5303,7 +5169,7 @@
           <a:bodyPr wrap="square" lIns="0" tIns="0" rIns="0" bIns="0" rtlCol="0" anchor="ctr"/>
           <a:lstStyle/>
           <a:p>
-            <a:pPr indent="0" marL="0">
+            <a:pPr marL="0" indent="0">
               <a:buNone/>
             </a:pPr>
             <a:r>
@@ -5339,7 +5205,7 @@
           <a:bodyPr wrap="square" lIns="0" tIns="0" rIns="0" bIns="0" rtlCol="0" anchor="ctr"/>
           <a:lstStyle/>
           <a:p>
-            <a:pPr algn="r" indent="0" marL="0">
+            <a:pPr marL="0" indent="0" algn="r">
               <a:buNone/>
             </a:pPr>
             <a:r>
@@ -5375,7 +5241,7 @@
           <a:bodyPr wrap="square" lIns="0" tIns="0" rIns="0" bIns="0" rtlCol="0" anchor="ctr"/>
           <a:lstStyle/>
           <a:p>
-            <a:pPr algn="r" indent="0" marL="0">
+            <a:pPr marL="0" indent="0" algn="r">
               <a:buNone/>
             </a:pPr>
             <a:r>
@@ -5411,7 +5277,7 @@
           <a:bodyPr wrap="square" lIns="0" tIns="0" rIns="0" bIns="0" rtlCol="0" anchor="ctr"/>
           <a:lstStyle/>
           <a:p>
-            <a:pPr algn="r" indent="0" marL="0">
+            <a:pPr marL="0" indent="0" algn="r">
               <a:buNone/>
             </a:pPr>
             <a:r>
@@ -5447,7 +5313,7 @@
           <a:bodyPr wrap="square" lIns="0" tIns="0" rIns="0" bIns="0" rtlCol="0" anchor="ctr"/>
           <a:lstStyle/>
           <a:p>
-            <a:pPr indent="0" marL="0">
+            <a:pPr marL="0" indent="0">
               <a:buNone/>
             </a:pPr>
             <a:r>
@@ -5483,7 +5349,7 @@
           <a:bodyPr wrap="square" lIns="0" tIns="0" rIns="0" bIns="0" rtlCol="0" anchor="ctr"/>
           <a:lstStyle/>
           <a:p>
-            <a:pPr algn="r" indent="0" marL="0">
+            <a:pPr marL="0" indent="0" algn="r">
               <a:buNone/>
             </a:pPr>
             <a:r>
@@ -5519,7 +5385,7 @@
           <a:bodyPr wrap="square" lIns="0" tIns="0" rIns="0" bIns="0" rtlCol="0" anchor="ctr"/>
           <a:lstStyle/>
           <a:p>
-            <a:pPr algn="r" indent="0" marL="0">
+            <a:pPr marL="0" indent="0" algn="r">
               <a:buNone/>
             </a:pPr>
             <a:r>
@@ -5555,7 +5421,7 @@
           <a:bodyPr wrap="square" lIns="0" tIns="0" rIns="0" bIns="0" rtlCol="0" anchor="ctr"/>
           <a:lstStyle/>
           <a:p>
-            <a:pPr algn="r" indent="0" marL="0">
+            <a:pPr marL="0" indent="0" algn="r">
               <a:buNone/>
             </a:pPr>
             <a:r>
@@ -5591,7 +5457,7 @@
           <a:bodyPr wrap="square" lIns="0" tIns="0" rIns="0" bIns="0" rtlCol="0" anchor="ctr"/>
           <a:lstStyle/>
           <a:p>
-            <a:pPr indent="0" marL="0">
+            <a:pPr marL="0" indent="0">
               <a:buNone/>
             </a:pPr>
             <a:r>
@@ -5627,7 +5493,7 @@
           <a:bodyPr wrap="square" lIns="0" tIns="0" rIns="0" bIns="0" rtlCol="0" anchor="ctr"/>
           <a:lstStyle/>
           <a:p>
-            <a:pPr algn="r" indent="0" marL="0">
+            <a:pPr marL="0" indent="0" algn="r">
               <a:buNone/>
             </a:pPr>
             <a:r>
@@ -5663,7 +5529,7 @@
           <a:bodyPr wrap="square" lIns="0" tIns="0" rIns="0" bIns="0" rtlCol="0" anchor="ctr"/>
           <a:lstStyle/>
           <a:p>
-            <a:pPr algn="r" indent="0" marL="0">
+            <a:pPr marL="0" indent="0" algn="r">
               <a:buNone/>
             </a:pPr>
             <a:r>
@@ -5699,7 +5565,7 @@
           <a:bodyPr wrap="square" lIns="0" tIns="0" rIns="0" bIns="0" rtlCol="0" anchor="ctr"/>
           <a:lstStyle/>
           <a:p>
-            <a:pPr algn="r" indent="0" marL="0">
+            <a:pPr marL="0" indent="0" algn="r">
               <a:buNone/>
             </a:pPr>
             <a:r>
@@ -5735,7 +5601,7 @@
           <a:bodyPr wrap="square" lIns="0" tIns="0" rIns="0" bIns="0" rtlCol="0" anchor="ctr"/>
           <a:lstStyle/>
           <a:p>
-            <a:pPr indent="0" marL="0">
+            <a:pPr marL="0" indent="0">
               <a:buNone/>
             </a:pPr>
             <a:r>
@@ -5771,7 +5637,7 @@
           <a:bodyPr wrap="square" lIns="0" tIns="0" rIns="0" bIns="0" rtlCol="0" anchor="ctr"/>
           <a:lstStyle/>
           <a:p>
-            <a:pPr algn="r" indent="0" marL="0">
+            <a:pPr marL="0" indent="0" algn="r">
               <a:buNone/>
             </a:pPr>
             <a:r>
@@ -5807,7 +5673,7 @@
           <a:bodyPr wrap="square" lIns="0" tIns="0" rIns="0" bIns="0" rtlCol="0" anchor="ctr"/>
           <a:lstStyle/>
           <a:p>
-            <a:pPr algn="r" indent="0" marL="0">
+            <a:pPr marL="0" indent="0" algn="r">
               <a:buNone/>
             </a:pPr>
             <a:r>
@@ -5843,7 +5709,7 @@
           <a:bodyPr wrap="square" lIns="0" tIns="0" rIns="0" bIns="0" rtlCol="0" anchor="ctr"/>
           <a:lstStyle/>
           <a:p>
-            <a:pPr algn="r" indent="0" marL="0">
+            <a:pPr marL="0" indent="0" algn="r">
               <a:buNone/>
             </a:pPr>
             <a:r>
@@ -5879,7 +5745,7 @@
           <a:bodyPr wrap="square" lIns="0" tIns="0" rIns="0" bIns="0" rtlCol="0" anchor="ctr"/>
           <a:lstStyle/>
           <a:p>
-            <a:pPr indent="0" marL="0">
+            <a:pPr marL="0" indent="0">
               <a:buNone/>
             </a:pPr>
             <a:r>
@@ -5915,7 +5781,7 @@
           <a:bodyPr wrap="square" lIns="0" tIns="0" rIns="0" bIns="0" rtlCol="0" anchor="ctr"/>
           <a:lstStyle/>
           <a:p>
-            <a:pPr algn="r" indent="0" marL="0">
+            <a:pPr marL="0" indent="0" algn="r">
               <a:buNone/>
             </a:pPr>
             <a:r>
@@ -5951,7 +5817,7 @@
           <a:bodyPr wrap="square" lIns="0" tIns="0" rIns="0" bIns="0" rtlCol="0" anchor="ctr"/>
           <a:lstStyle/>
           <a:p>
-            <a:pPr algn="r" indent="0" marL="0">
+            <a:pPr marL="0" indent="0" algn="r">
               <a:buNone/>
             </a:pPr>
             <a:r>
@@ -5987,7 +5853,7 @@
           <a:bodyPr wrap="square" lIns="0" tIns="0" rIns="0" bIns="0" rtlCol="0" anchor="ctr"/>
           <a:lstStyle/>
           <a:p>
-            <a:pPr algn="r" indent="0" marL="0">
+            <a:pPr marL="0" indent="0" algn="r">
               <a:buNone/>
             </a:pPr>
             <a:r>
@@ -6025,7 +5891,7 @@
           </a:bodyPr>
           <a:lstStyle/>
           <a:p>
-            <a:pPr indent="0" marL="0">
+            <a:pPr marL="0" indent="0">
               <a:buNone/>
             </a:pPr>
             <a:r>
@@ -6056,6 +5922,7 @@
         <a:solidFill>
           <a:srgbClr val="0B1020"/>
         </a:solidFill>
+        <a:effectLst/>
       </p:bgPr>
     </p:bg>
     <p:spTree>
@@ -6096,7 +5963,10 @@
         </p:spPr>
         <p:txBody>
           <a:bodyPr/>
-          <a:p/>
+          <a:lstStyle/>
+          <a:p>
+            <a:endParaRPr/>
+          </a:p>
         </p:txBody>
       </p:sp>
       <p:sp>
@@ -6123,7 +5993,10 @@
         </p:spPr>
         <p:txBody>
           <a:bodyPr/>
-          <a:p/>
+          <a:lstStyle/>
+          <a:p>
+            <a:endParaRPr/>
+          </a:p>
         </p:txBody>
       </p:sp>
       <p:sp>
@@ -6147,7 +6020,7 @@
           <a:bodyPr wrap="square" lIns="0" tIns="0" rIns="0" bIns="0" rtlCol="0" anchor="ctr"/>
           <a:lstStyle/>
           <a:p>
-            <a:pPr indent="0" marL="0">
+            <a:pPr marL="0" indent="0">
               <a:buNone/>
             </a:pPr>
             <a:r>
@@ -6186,7 +6059,7 @@
           <a:bodyPr wrap="square" lIns="0" tIns="0" rIns="0" bIns="0" rtlCol="0" anchor="ctr"/>
           <a:lstStyle/>
           <a:p>
-            <a:pPr indent="0" marL="0">
+            <a:pPr marL="0" indent="0">
               <a:buNone/>
             </a:pPr>
             <a:r>
@@ -6222,7 +6095,7 @@
           <a:bodyPr wrap="square" lIns="0" tIns="0" rIns="0" bIns="0" rtlCol="0" anchor="ctr"/>
           <a:lstStyle/>
           <a:p>
-            <a:pPr algn="r" indent="0" marL="0">
+            <a:pPr marL="0" indent="0" algn="r">
               <a:buNone/>
             </a:pPr>
             <a:r>
@@ -6256,11 +6129,11 @@
         </p:spPr>
         <p:txBody>
           <a:bodyPr wrap="square" lIns="381" tIns="381" rIns="381" bIns="381" rtlCol="0" anchor="ctr">
-            <a:normAutofit/>
+            <a:normAutofit lnSpcReduction="10000"/>
           </a:bodyPr>
           <a:lstStyle/>
           <a:p>
-            <a:pPr indent="0" marL="0">
+            <a:pPr marL="0" indent="0">
               <a:buNone/>
             </a:pPr>
             <a:r>
@@ -6277,14 +6150,14 @@
       </p:sp>
       <p:pic>
         <p:nvPicPr>
-          <p:cNvPr id="8" name="Image 0" descr="/mnt/data/audio_outputs/confusion_matrix.png">    </p:cNvPr>
+          <p:cNvPr id="8" name="Image 0" descr="/mnt/data/audio_outputs/confusion_matrix.png"/>
           <p:cNvPicPr>
             <a:picLocks noChangeAspect="1"/>
           </p:cNvPicPr>
           <p:nvPr/>
         </p:nvPicPr>
         <p:blipFill>
-          <a:blip r:embed="rId1"/>
+          <a:blip r:embed="rId3"/>
           <a:stretch>
             <a:fillRect/>
           </a:stretch>
@@ -6301,14 +6174,14 @@
       </p:pic>
       <p:pic>
         <p:nvPicPr>
-          <p:cNvPr id="9" name="Image 1" descr="/mnt/data/audio_outputs/model_rmse.png">    </p:cNvPr>
+          <p:cNvPr id="9" name="Image 1" descr="/mnt/data/audio_outputs/model_rmse.png"/>
           <p:cNvPicPr>
             <a:picLocks noChangeAspect="1"/>
           </p:cNvPicPr>
           <p:nvPr/>
         </p:nvPicPr>
         <p:blipFill>
-          <a:blip r:embed="rId2"/>
+          <a:blip r:embed="rId4"/>
           <a:stretch>
             <a:fillRect/>
           </a:stretch>
@@ -6325,14 +6198,14 @@
       </p:pic>
       <p:pic>
         <p:nvPicPr>
-          <p:cNvPr id="10" name="Image 2" descr="/mnt/data/audio_outputs/model_r2.png">    </p:cNvPr>
+          <p:cNvPr id="10" name="Image 2" descr="/mnt/data/audio_outputs/model_r2.png"/>
           <p:cNvPicPr>
             <a:picLocks noChangeAspect="1"/>
           </p:cNvPicPr>
           <p:nvPr/>
         </p:nvPicPr>
         <p:blipFill>
-          <a:blip r:embed="rId3"/>
+          <a:blip r:embed="rId5"/>
           <a:stretch>
             <a:fillRect/>
           </a:stretch>
@@ -6363,6 +6236,7 @@
         <a:solidFill>
           <a:srgbClr val="0B1020"/>
         </a:solidFill>
+        <a:effectLst/>
       </p:bgPr>
     </p:bg>
     <p:spTree>
@@ -6403,7 +6277,10 @@
         </p:spPr>
         <p:txBody>
           <a:bodyPr/>
-          <a:p/>
+          <a:lstStyle/>
+          <a:p>
+            <a:endParaRPr/>
+          </a:p>
         </p:txBody>
       </p:sp>
       <p:sp>
@@ -6430,7 +6307,10 @@
         </p:spPr>
         <p:txBody>
           <a:bodyPr/>
-          <a:p/>
+          <a:lstStyle/>
+          <a:p>
+            <a:endParaRPr/>
+          </a:p>
         </p:txBody>
       </p:sp>
       <p:sp>
@@ -6454,7 +6334,7 @@
           <a:bodyPr wrap="square" lIns="0" tIns="0" rIns="0" bIns="0" rtlCol="0" anchor="ctr"/>
           <a:lstStyle/>
           <a:p>
-            <a:pPr indent="0" marL="0">
+            <a:pPr marL="0" indent="0">
               <a:buNone/>
             </a:pPr>
             <a:r>
@@ -6493,7 +6373,7 @@
           <a:bodyPr wrap="square" lIns="0" tIns="0" rIns="0" bIns="0" rtlCol="0" anchor="ctr"/>
           <a:lstStyle/>
           <a:p>
-            <a:pPr indent="0" marL="0">
+            <a:pPr marL="0" indent="0">
               <a:buNone/>
             </a:pPr>
             <a:r>
@@ -6529,7 +6409,7 @@
           <a:bodyPr wrap="square" lIns="0" tIns="0" rIns="0" bIns="0" rtlCol="0" anchor="ctr"/>
           <a:lstStyle/>
           <a:p>
-            <a:pPr algn="r" indent="0" marL="0">
+            <a:pPr marL="0" indent="0" algn="r">
               <a:buNone/>
             </a:pPr>
             <a:r>
@@ -6546,14 +6426,14 @@
       </p:sp>
       <p:pic>
         <p:nvPicPr>
-          <p:cNvPr id="7" name="Image 0" descr="/mnt/data/audio_outputs/rf_feature_importance.png">    </p:cNvPr>
+          <p:cNvPr id="7" name="Image 0" descr="/mnt/data/audio_outputs/rf_feature_importance.png"/>
           <p:cNvPicPr>
             <a:picLocks noChangeAspect="1"/>
           </p:cNvPicPr>
           <p:nvPr/>
         </p:nvPicPr>
         <p:blipFill>
-          <a:blip r:embed="rId1"/>
+          <a:blip r:embed="rId3"/>
           <a:stretch>
             <a:fillRect/>
           </a:stretch>
@@ -6570,14 +6450,14 @@
       </p:pic>
       <p:pic>
         <p:nvPicPr>
-          <p:cNvPr id="8" name="Image 1" descr="/mnt/data/audio_outputs/xgb_feature_importance.png">    </p:cNvPr>
+          <p:cNvPr id="8" name="Image 1" descr="/mnt/data/audio_outputs/xgb_feature_importance.png"/>
           <p:cNvPicPr>
             <a:picLocks noChangeAspect="1"/>
           </p:cNvPicPr>
           <p:nvPr/>
         </p:nvPicPr>
         <p:blipFill>
-          <a:blip r:embed="rId2"/>
+          <a:blip r:embed="rId4"/>
           <a:stretch>
             <a:fillRect/>
           </a:stretch>
@@ -6611,11 +6491,11 @@
         </p:spPr>
         <p:txBody>
           <a:bodyPr wrap="square" lIns="381" tIns="381" rIns="381" bIns="381" rtlCol="0" anchor="ctr">
-            <a:normAutofit/>
+            <a:normAutofit fontScale="92500" lnSpcReduction="10000"/>
           </a:bodyPr>
           <a:lstStyle/>
           <a:p>
-            <a:pPr indent="0" marL="0">
+            <a:pPr marL="0" indent="0">
               <a:buNone/>
             </a:pPr>
             <a:r>
@@ -6646,6 +6526,7 @@
         <a:solidFill>
           <a:srgbClr val="0B1020"/>
         </a:solidFill>
+        <a:effectLst/>
       </p:bgPr>
     </p:bg>
     <p:spTree>
@@ -6686,7 +6567,10 @@
         </p:spPr>
         <p:txBody>
           <a:bodyPr/>
-          <a:p/>
+          <a:lstStyle/>
+          <a:p>
+            <a:endParaRPr/>
+          </a:p>
         </p:txBody>
       </p:sp>
       <p:sp>
@@ -6713,7 +6597,10 @@
         </p:spPr>
         <p:txBody>
           <a:bodyPr/>
-          <a:p/>
+          <a:lstStyle/>
+          <a:p>
+            <a:endParaRPr/>
+          </a:p>
         </p:txBody>
       </p:sp>
       <p:sp>
@@ -6745,42 +6632,6 @@
       </p:sp>
       <p:sp>
         <p:nvSpPr>
-          <p:cNvPr id="5" name="Text 3"/>
-          <p:cNvSpPr/>
-          <p:nvPr/>
-        </p:nvSpPr>
-        <p:spPr>
-          <a:xfrm>
-            <a:off x="521208" y="859536"/>
-            <a:ext cx="8046720" cy="256032"/>
-          </a:xfrm>
-          <a:prstGeom prst="rect">
-            <a:avLst/>
-          </a:prstGeom>
-          <a:noFill/>
-          <a:ln/>
-        </p:spPr>
-        <p:txBody>
-          <a:bodyPr wrap="square" lIns="0" tIns="0" rIns="0" bIns="0" rtlCol="0" anchor="ctr"/>
-          <a:lstStyle/>
-          <a:p>
-            <a:pPr indent="0" marL="0">
-              <a:buNone/>
-            </a:pPr>
-            <a:r>
-              <a:rPr lang="en-US" sz="1250" dirty="0">
-                <a:solidFill>
-                  <a:srgbClr val="B7C2D9"/>
-                </a:solidFill>
-              </a:rPr>
-              <a:t>The project is GitHub-ready after approval</a:t>
-            </a:r>
-            <a:endParaRPr lang="en-US" sz="1250" dirty="0"/>
-          </a:p>
-        </p:txBody>
-      </p:sp>
-      <p:sp>
-        <p:nvSpPr>
           <p:cNvPr id="6" name="Text 4"/>
           <p:cNvSpPr/>
           <p:nvPr/>
@@ -6800,7 +6651,7 @@
           <a:bodyPr wrap="square" lIns="0" tIns="0" rIns="0" bIns="0" rtlCol="0" anchor="ctr"/>
           <a:lstStyle/>
           <a:p>
-            <a:pPr algn="r" indent="0" marL="0">
+            <a:pPr marL="0" indent="0" algn="r">
               <a:buNone/>
             </a:pPr>
             <a:r>
@@ -6823,31 +6674,31 @@
         </p:nvSpPr>
         <p:spPr>
           <a:xfrm>
-            <a:off x="731520" y="1280160"/>
-            <a:ext cx="2926080" cy="384048"/>
-          </a:xfrm>
-          <a:prstGeom prst="rect">
-            <a:avLst/>
-          </a:prstGeom>
-          <a:noFill/>
-          <a:ln/>
-        </p:spPr>
-        <p:txBody>
-          <a:bodyPr wrap="square" lIns="0" tIns="0" rIns="0" bIns="0" rtlCol="0" anchor="ctr"/>
-          <a:lstStyle/>
-          <a:p>
-            <a:pPr indent="0" marL="0">
-              <a:buNone/>
-            </a:pPr>
-            <a:r>
-              <a:rPr lang="en-US" sz="2600" b="1" dirty="0">
+            <a:off x="4526280" y="228601"/>
+            <a:ext cx="3821819" cy="384048"/>
+          </a:xfrm>
+          <a:prstGeom prst="rect">
+            <a:avLst/>
+          </a:prstGeom>
+          <a:noFill/>
+          <a:ln/>
+        </p:spPr>
+        <p:txBody>
+          <a:bodyPr wrap="square" lIns="0" tIns="0" rIns="0" bIns="0" rtlCol="0" anchor="ctr"/>
+          <a:lstStyle/>
+          <a:p>
+            <a:pPr marL="0" indent="0">
+              <a:buNone/>
+            </a:pPr>
+            <a:r>
+              <a:rPr lang="en-US" sz="4000" b="1" dirty="0">
                 <a:solidFill>
                   <a:srgbClr val="36D1DC"/>
                 </a:solidFill>
               </a:rPr>
               <a:t>Main takeaway</a:t>
             </a:r>
-            <a:endParaRPr lang="en-US" sz="2600" dirty="0"/>
+            <a:endParaRPr lang="en-US" sz="4000" dirty="0"/>
           </a:p>
         </p:txBody>
       </p:sp>
@@ -6859,8 +6710,8 @@
         </p:nvSpPr>
         <p:spPr>
           <a:xfrm>
-            <a:off x="777240" y="1938528"/>
-            <a:ext cx="4892040" cy="914400"/>
+            <a:off x="3657599" y="1920240"/>
+            <a:ext cx="5589037" cy="1847087"/>
           </a:xfrm>
           <a:prstGeom prst="rect">
             <a:avLst/>
@@ -6874,18 +6725,18 @@
           </a:bodyPr>
           <a:lstStyle/>
           <a:p>
-            <a:pPr indent="0" marL="0">
-              <a:buNone/>
-            </a:pPr>
-            <a:r>
-              <a:rPr lang="en-US" sz="2100" dirty="0">
+            <a:pPr marL="0" indent="0">
+              <a:buNone/>
+            </a:pPr>
+            <a:r>
+              <a:rPr lang="en-US" sz="3000" dirty="0">
                 <a:solidFill>
                   <a:srgbClr val="F7FAFC"/>
                 </a:solidFill>
               </a:rPr>
               <a:t>Hand-built audio features were enough to classify bird, cat, and dog clips with about 87% accuracy using Random Forest.</a:t>
             </a:r>
-            <a:endParaRPr lang="en-US" sz="2100" dirty="0"/>
+            <a:endParaRPr lang="en-US" sz="3000" dirty="0"/>
           </a:p>
         </p:txBody>
       </p:sp>
@@ -6897,7 +6748,7 @@
         </p:nvSpPr>
         <p:spPr>
           <a:xfrm>
-            <a:off x="777240" y="3090672"/>
+            <a:off x="2747010" y="6810984"/>
             <a:ext cx="4526280" cy="0"/>
           </a:xfrm>
           <a:prstGeom prst="line">
@@ -6915,219 +6766,153 @@
         </p:spPr>
         <p:txBody>
           <a:bodyPr/>
-          <a:p/>
-        </p:txBody>
-      </p:sp>
-      <p:sp>
-        <p:nvSpPr>
-          <p:cNvPr id="10" name="Text 8"/>
-          <p:cNvSpPr/>
-          <p:nvPr/>
-        </p:nvSpPr>
-        <p:spPr>
-          <a:xfrm>
-            <a:off x="6400800" y="1335024"/>
-            <a:ext cx="3657600" cy="182880"/>
-          </a:xfrm>
-          <a:prstGeom prst="rect">
-            <a:avLst/>
-          </a:prstGeom>
-          <a:noFill/>
-          <a:ln/>
-        </p:spPr>
-        <p:txBody>
-          <a:bodyPr wrap="square" lIns="0" tIns="0" rIns="0" bIns="0" rtlCol="0" anchor="ctr"/>
-          <a:lstStyle/>
-          <a:p>
-            <a:pPr indent="0" marL="0">
-              <a:buNone/>
-            </a:pPr>
-            <a:r>
-              <a:rPr lang="en-US" sz="950" b="1" dirty="0">
-                <a:solidFill>
-                  <a:srgbClr val="FFB84D"/>
-                </a:solidFill>
-              </a:rPr>
-              <a:t>WHAT I WOULD IMPROVE NEXT</a:t>
-            </a:r>
-            <a:endParaRPr lang="en-US" sz="950" dirty="0"/>
-          </a:p>
-        </p:txBody>
-      </p:sp>
-      <p:sp>
-        <p:nvSpPr>
-          <p:cNvPr id="11" name="Text 9"/>
-          <p:cNvSpPr/>
-          <p:nvPr/>
-        </p:nvSpPr>
-        <p:spPr>
-          <a:xfrm>
-            <a:off x="6446520" y="1783080"/>
-            <a:ext cx="4937760" cy="1645920"/>
-          </a:xfrm>
-          <a:prstGeom prst="rect">
-            <a:avLst/>
-          </a:prstGeom>
-          <a:noFill/>
-          <a:ln/>
-        </p:spPr>
-        <p:txBody>
-          <a:bodyPr wrap="square" lIns="381" tIns="381" rIns="381" bIns="381" rtlCol="0" anchor="ctr">
-            <a:normAutofit/>
-          </a:bodyPr>
-          <a:lstStyle/>
-          <a:p>
-            <a:pPr marL="152400" indent="-152400">
-              <a:buSzPct val="100000"/>
-              <a:buChar char="•"/>
-            </a:pPr>
-            <a:r>
-              <a:rPr lang="en-US" sz="1600" dirty="0">
-                <a:solidFill>
-                  <a:srgbClr val="F7FAFC"/>
-                </a:solidFill>
-              </a:rPr>
-              <a:t>Use MFCCs from librosa directly and tune model hyperparameters.</a:t>
-            </a:r>
-            <a:endParaRPr lang="en-US" sz="1600" dirty="0"/>
-          </a:p>
-          <a:p>
-            <a:pPr marL="152400" indent="-152400">
-              <a:buSzPct val="100000"/>
-              <a:buChar char="•"/>
-            </a:pPr>
-            <a:r>
-              <a:rPr lang="en-US" sz="1600" dirty="0">
-                <a:solidFill>
-                  <a:srgbClr val="F7FAFC"/>
-                </a:solidFill>
-              </a:rPr>
-              <a:t>Try a CNN on spectrogram images instead of hand-built features.</a:t>
-            </a:r>
-            <a:endParaRPr lang="en-US" sz="1600" dirty="0"/>
-          </a:p>
-          <a:p>
-            <a:pPr marL="152400" indent="-152400">
-              <a:buSzPct val="100000"/>
-              <a:buChar char="•"/>
-            </a:pPr>
-            <a:r>
-              <a:rPr lang="en-US" sz="1600" dirty="0">
-                <a:solidFill>
-                  <a:srgbClr val="F7FAFC"/>
-                </a:solidFill>
-              </a:rPr>
-              <a:t>Add cross-validation for a more stable model comparison.</a:t>
-            </a:r>
-            <a:endParaRPr lang="en-US" sz="1600" dirty="0"/>
-          </a:p>
-        </p:txBody>
-      </p:sp>
-      <p:sp>
-        <p:nvSpPr>
-          <p:cNvPr id="12" name="Text 10"/>
-          <p:cNvSpPr/>
-          <p:nvPr/>
-        </p:nvSpPr>
-        <p:spPr>
-          <a:xfrm>
-            <a:off x="6400800" y="4160520"/>
-            <a:ext cx="2743200" cy="182880"/>
-          </a:xfrm>
-          <a:prstGeom prst="rect">
-            <a:avLst/>
-          </a:prstGeom>
-          <a:noFill/>
-          <a:ln/>
-        </p:spPr>
-        <p:txBody>
-          <a:bodyPr wrap="square" lIns="0" tIns="0" rIns="0" bIns="0" rtlCol="0" anchor="ctr"/>
-          <a:lstStyle/>
-          <a:p>
-            <a:pPr indent="0" marL="0">
-              <a:buNone/>
-            </a:pPr>
-            <a:r>
-              <a:rPr lang="en-US" sz="950" b="1" dirty="0">
-                <a:solidFill>
-                  <a:srgbClr val="67E8A5"/>
-                </a:solidFill>
-              </a:rPr>
-              <a:t>SUBMISSION PLAN</a:t>
-            </a:r>
-            <a:endParaRPr lang="en-US" sz="950" dirty="0"/>
-          </a:p>
-        </p:txBody>
-      </p:sp>
-      <p:sp>
-        <p:nvSpPr>
-          <p:cNvPr id="13" name="Text 11"/>
-          <p:cNvSpPr/>
-          <p:nvPr/>
-        </p:nvSpPr>
-        <p:spPr>
-          <a:xfrm>
-            <a:off x="6446520" y="4572000"/>
-            <a:ext cx="4754880" cy="1133856"/>
-          </a:xfrm>
-          <a:prstGeom prst="rect">
-            <a:avLst/>
-          </a:prstGeom>
-          <a:noFill/>
-          <a:ln/>
-        </p:spPr>
-        <p:txBody>
-          <a:bodyPr wrap="square" lIns="381" tIns="381" rIns="381" bIns="381" rtlCol="0" anchor="ctr">
-            <a:normAutofit/>
-          </a:bodyPr>
-          <a:lstStyle/>
-          <a:p>
-            <a:pPr marL="152400" indent="-152400">
-              <a:buSzPct val="100000"/>
-              <a:buChar char="•"/>
-            </a:pPr>
-            <a:r>
-              <a:rPr lang="en-US" sz="1600" dirty="0">
-                <a:solidFill>
-                  <a:srgbClr val="F7FAFC"/>
-                </a:solidFill>
-              </a:rPr>
-              <a:t>Email instructor the selected project for approval.</a:t>
-            </a:r>
-            <a:endParaRPr lang="en-US" sz="1600" dirty="0"/>
-          </a:p>
-          <a:p>
-            <a:pPr marL="152400" indent="-152400">
-              <a:buSzPct val="100000"/>
-              <a:buChar char="•"/>
-            </a:pPr>
-            <a:r>
-              <a:rPr lang="en-US" sz="1600" dirty="0">
-                <a:solidFill>
-                  <a:srgbClr val="F7FAFC"/>
-                </a:solidFill>
-              </a:rPr>
-              <a:t>Create GitHub repo with code, slides, and results.</a:t>
-            </a:r>
-            <a:endParaRPr lang="en-US" sz="1600" dirty="0"/>
-          </a:p>
-          <a:p>
-            <a:pPr marL="152400" indent="-152400">
-              <a:buSzPct val="100000"/>
-              <a:buChar char="•"/>
-            </a:pPr>
-            <a:r>
-              <a:rPr lang="en-US" sz="1600" dirty="0">
-                <a:solidFill>
-                  <a:srgbClr val="F7FAFC"/>
-                </a:solidFill>
-              </a:rPr>
-              <a:t>Submit GitHub link to Canvas.</a:t>
-            </a:r>
-            <a:endParaRPr lang="en-US" sz="1600" dirty="0"/>
-          </a:p>
-        </p:txBody>
-      </p:sp>
+          <a:lstStyle/>
+          <a:p>
+            <a:endParaRPr/>
+          </a:p>
+        </p:txBody>
+      </p:sp>
+      <p:pic>
+        <p:nvPicPr>
+          <p:cNvPr id="1026" name="Picture 2" descr="Gaming Cat GIFs | Tenor">
+            <a:extLst>
+              <a:ext uri="{FF2B5EF4-FFF2-40B4-BE49-F238E27FC236}">
+                <a16:creationId xmlns:a16="http://schemas.microsoft.com/office/drawing/2014/main" id="{622BBAB7-3F42-C9D3-7D8C-814EE430B8A2}"/>
+              </a:ext>
+            </a:extLst>
+          </p:cNvPr>
+          <p:cNvPicPr>
+            <a:picLocks noChangeAspect="1" noChangeArrowheads="1"/>
+          </p:cNvPicPr>
+          <p:nvPr/>
+        </p:nvPicPr>
+        <p:blipFill>
+          <a:blip r:embed="rId3">
+            <a:extLst>
+              <a:ext uri="{28A0092B-C50C-407E-A947-70E740481C1C}">
+                <a14:useLocalDpi xmlns:a14="http://schemas.microsoft.com/office/drawing/2010/main" val="0"/>
+              </a:ext>
+            </a:extLst>
+          </a:blip>
+          <a:srcRect/>
+          <a:stretch>
+            <a:fillRect/>
+          </a:stretch>
+        </p:blipFill>
+        <p:spPr bwMode="auto">
+          <a:xfrm>
+            <a:off x="4967287" y="4125087"/>
+            <a:ext cx="2171700" cy="2105025"/>
+          </a:xfrm>
+          <a:prstGeom prst="rect">
+            <a:avLst/>
+          </a:prstGeom>
+          <a:noFill/>
+          <a:extLst>
+            <a:ext uri="{909E8E84-426E-40DD-AFC4-6F175D3DCCD1}">
+              <a14:hiddenFill xmlns:a14="http://schemas.microsoft.com/office/drawing/2010/main">
+                <a:solidFill>
+                  <a:srgbClr val="FFFFFF"/>
+                </a:solidFill>
+              </a14:hiddenFill>
+            </a:ext>
+          </a:extLst>
+        </p:spPr>
+      </p:pic>
+      <p:pic>
+        <p:nvPicPr>
+          <p:cNvPr id="1028" name="Picture 4" descr="Red (Movie) | Angry Birds Wiki | Fandom">
+            <a:extLst>
+              <a:ext uri="{FF2B5EF4-FFF2-40B4-BE49-F238E27FC236}">
+                <a16:creationId xmlns:a16="http://schemas.microsoft.com/office/drawing/2014/main" id="{32FFC29D-E16A-96A8-3714-2C567B0D05A6}"/>
+              </a:ext>
+            </a:extLst>
+          </p:cNvPr>
+          <p:cNvPicPr>
+            <a:picLocks noChangeAspect="1" noChangeArrowheads="1"/>
+          </p:cNvPicPr>
+          <p:nvPr/>
+        </p:nvPicPr>
+        <p:blipFill>
+          <a:blip r:embed="rId4">
+            <a:extLst>
+              <a:ext uri="{28A0092B-C50C-407E-A947-70E740481C1C}">
+                <a14:useLocalDpi xmlns:a14="http://schemas.microsoft.com/office/drawing/2010/main" val="0"/>
+              </a:ext>
+            </a:extLst>
+          </a:blip>
+          <a:srcRect/>
+          <a:stretch>
+            <a:fillRect/>
+          </a:stretch>
+        </p:blipFill>
+        <p:spPr bwMode="auto">
+          <a:xfrm>
+            <a:off x="737234" y="3867913"/>
+            <a:ext cx="1743075" cy="2619375"/>
+          </a:xfrm>
+          <a:prstGeom prst="rect">
+            <a:avLst/>
+          </a:prstGeom>
+          <a:noFill/>
+          <a:extLst>
+            <a:ext uri="{909E8E84-426E-40DD-AFC4-6F175D3DCCD1}">
+              <a14:hiddenFill xmlns:a14="http://schemas.microsoft.com/office/drawing/2010/main">
+                <a:solidFill>
+                  <a:srgbClr val="FFFFFF"/>
+                </a:solidFill>
+              </a14:hiddenFill>
+            </a:ext>
+          </a:extLst>
+        </p:spPr>
+      </p:pic>
+      <p:pic>
+        <p:nvPicPr>
+          <p:cNvPr id="1030" name="Picture 6" descr="Walter White The Dog | TikTok">
+            <a:extLst>
+              <a:ext uri="{FF2B5EF4-FFF2-40B4-BE49-F238E27FC236}">
+                <a16:creationId xmlns:a16="http://schemas.microsoft.com/office/drawing/2014/main" id="{C3278825-2B7F-9DB4-C926-15200CE35C0F}"/>
+              </a:ext>
+            </a:extLst>
+          </p:cNvPr>
+          <p:cNvPicPr>
+            <a:picLocks noChangeAspect="1" noChangeArrowheads="1"/>
+          </p:cNvPicPr>
+          <p:nvPr/>
+        </p:nvPicPr>
+        <p:blipFill>
+          <a:blip r:embed="rId5">
+            <a:extLst>
+              <a:ext uri="{28A0092B-C50C-407E-A947-70E740481C1C}">
+                <a14:useLocalDpi xmlns:a14="http://schemas.microsoft.com/office/drawing/2010/main" val="0"/>
+              </a:ext>
+            </a:extLst>
+          </a:blip>
+          <a:srcRect/>
+          <a:stretch>
+            <a:fillRect/>
+          </a:stretch>
+        </p:blipFill>
+        <p:spPr bwMode="auto">
+          <a:xfrm>
+            <a:off x="9625966" y="3866198"/>
+            <a:ext cx="1828800" cy="2495550"/>
+          </a:xfrm>
+          <a:prstGeom prst="rect">
+            <a:avLst/>
+          </a:prstGeom>
+          <a:noFill/>
+          <a:extLst>
+            <a:ext uri="{909E8E84-426E-40DD-AFC4-6F175D3DCCD1}">
+              <a14:hiddenFill xmlns:a14="http://schemas.microsoft.com/office/drawing/2010/main">
+                <a:solidFill>
+                  <a:srgbClr val="FFFFFF"/>
+                </a:solidFill>
+              </a14:hiddenFill>
+            </a:ext>
+          </a:extLst>
+        </p:spPr>
+      </p:pic>
     </p:spTree>
   </p:cSld>
   <p:clrMapOvr>
@@ -7429,4 +7214,319 @@
     </a:ext>
   </a:extLst>
 </a:theme>
+</file>
+
+<file path=ppt/theme/theme2.xml><?xml version="1.0" encoding="utf-8"?>
+<a:theme xmlns:a="http://schemas.openxmlformats.org/drawingml/2006/main" name="Office Theme">
+  <a:themeElements>
+    <a:clrScheme name="Office">
+      <a:dk1>
+        <a:sysClr val="windowText" lastClr="000000"/>
+      </a:dk1>
+      <a:lt1>
+        <a:sysClr val="window" lastClr="FFFFFF"/>
+      </a:lt1>
+      <a:dk2>
+        <a:srgbClr val="0E2841"/>
+      </a:dk2>
+      <a:lt2>
+        <a:srgbClr val="E8E8E8"/>
+      </a:lt2>
+      <a:accent1>
+        <a:srgbClr val="156082"/>
+      </a:accent1>
+      <a:accent2>
+        <a:srgbClr val="E97132"/>
+      </a:accent2>
+      <a:accent3>
+        <a:srgbClr val="196B24"/>
+      </a:accent3>
+      <a:accent4>
+        <a:srgbClr val="0F9ED5"/>
+      </a:accent4>
+      <a:accent5>
+        <a:srgbClr val="A02B93"/>
+      </a:accent5>
+      <a:accent6>
+        <a:srgbClr val="4EA72E"/>
+      </a:accent6>
+      <a:hlink>
+        <a:srgbClr val="467886"/>
+      </a:hlink>
+      <a:folHlink>
+        <a:srgbClr val="96607D"/>
+      </a:folHlink>
+    </a:clrScheme>
+    <a:fontScheme name="Office">
+      <a:majorFont>
+        <a:latin typeface="Aptos Display" panose="02110004020202020204"/>
+        <a:ea typeface=""/>
+        <a:cs typeface=""/>
+        <a:font script="Jpan" typeface="游ゴシック Light"/>
+        <a:font script="Hang" typeface="맑은 고딕"/>
+        <a:font script="Hans" typeface="等线 Light"/>
+        <a:font script="Hant" typeface="新細明體"/>
+        <a:font script="Arab" typeface="Times New Roman"/>
+        <a:font script="Hebr" typeface="Times New Roman"/>
+        <a:font script="Thai" typeface="Angsana New"/>
+        <a:font script="Ethi" typeface="Nyala"/>
+        <a:font script="Beng" typeface="Vrinda"/>
+        <a:font script="Gujr" typeface="Shruti"/>
+        <a:font script="Khmr" typeface="MoolBoran"/>
+        <a:font script="Knda" typeface="Tunga"/>
+        <a:font script="Guru" typeface="Raavi"/>
+        <a:font script="Cans" typeface="Euphemia"/>
+        <a:font script="Cher" typeface="Plantagenet Cherokee"/>
+        <a:font script="Yiii" typeface="Microsoft Yi Baiti"/>
+        <a:font script="Tibt" typeface="Microsoft Himalaya"/>
+        <a:font script="Thaa" typeface="MV Boli"/>
+        <a:font script="Deva" typeface="Mangal"/>
+        <a:font script="Telu" typeface="Gautami"/>
+        <a:font script="Taml" typeface="Latha"/>
+        <a:font script="Syrc" typeface="Estrangelo Edessa"/>
+        <a:font script="Orya" typeface="Kalinga"/>
+        <a:font script="Mlym" typeface="Kartika"/>
+        <a:font script="Laoo" typeface="DokChampa"/>
+        <a:font script="Sinh" typeface="Iskoola Pota"/>
+        <a:font script="Mong" typeface="Mongolian Baiti"/>
+        <a:font script="Viet" typeface="Times New Roman"/>
+        <a:font script="Uigh" typeface="Microsoft Uighur"/>
+        <a:font script="Geor" typeface="Sylfaen"/>
+        <a:font script="Armn" typeface="Arial"/>
+        <a:font script="Bugi" typeface="Leelawadee UI"/>
+        <a:font script="Bopo" typeface="Microsoft JhengHei"/>
+        <a:font script="Java" typeface="Javanese Text"/>
+        <a:font script="Lisu" typeface="Segoe UI"/>
+        <a:font script="Mymr" typeface="Myanmar Text"/>
+        <a:font script="Nkoo" typeface="Ebrima"/>
+        <a:font script="Olck" typeface="Nirmala UI"/>
+        <a:font script="Osma" typeface="Ebrima"/>
+        <a:font script="Phag" typeface="Phagspa"/>
+        <a:font script="Syrn" typeface="Estrangelo Edessa"/>
+        <a:font script="Syrj" typeface="Estrangelo Edessa"/>
+        <a:font script="Syre" typeface="Estrangelo Edessa"/>
+        <a:font script="Sora" typeface="Nirmala UI"/>
+        <a:font script="Tale" typeface="Microsoft Tai Le"/>
+        <a:font script="Talu" typeface="Microsoft New Tai Lue"/>
+        <a:font script="Tfng" typeface="Ebrima"/>
+      </a:majorFont>
+      <a:minorFont>
+        <a:latin typeface="Aptos" panose="02110004020202020204"/>
+        <a:ea typeface=""/>
+        <a:cs typeface=""/>
+        <a:font script="Jpan" typeface="游ゴシック"/>
+        <a:font script="Hang" typeface="맑은 고딕"/>
+        <a:font script="Hans" typeface="等线"/>
+        <a:font script="Hant" typeface="新細明體"/>
+        <a:font script="Arab" typeface="Arial"/>
+        <a:font script="Hebr" typeface="Arial"/>
+        <a:font script="Thai" typeface="Cordia New"/>
+        <a:font script="Ethi" typeface="Nyala"/>
+        <a:font script="Beng" typeface="Vrinda"/>
+        <a:font script="Gujr" typeface="Shruti"/>
+        <a:font script="Khmr" typeface="DaunPenh"/>
+        <a:font script="Knda" typeface="Tunga"/>
+        <a:font script="Guru" typeface="Raavi"/>
+        <a:font script="Cans" typeface="Euphemia"/>
+        <a:font script="Cher" typeface="Plantagenet Cherokee"/>
+        <a:font script="Yiii" typeface="Microsoft Yi Baiti"/>
+        <a:font script="Tibt" typeface="Microsoft Himalaya"/>
+        <a:font script="Thaa" typeface="MV Boli"/>
+        <a:font script="Deva" typeface="Mangal"/>
+        <a:font script="Telu" typeface="Gautami"/>
+        <a:font script="Taml" typeface="Latha"/>
+        <a:font script="Syrc" typeface="Estrangelo Edessa"/>
+        <a:font script="Orya" typeface="Kalinga"/>
+        <a:font script="Mlym" typeface="Kartika"/>
+        <a:font script="Laoo" typeface="DokChampa"/>
+        <a:font script="Sinh" typeface="Iskoola Pota"/>
+        <a:font script="Mong" typeface="Mongolian Baiti"/>
+        <a:font script="Viet" typeface="Arial"/>
+        <a:font script="Uigh" typeface="Microsoft Uighur"/>
+        <a:font script="Geor" typeface="Sylfaen"/>
+        <a:font script="Armn" typeface="Arial"/>
+        <a:font script="Bugi" typeface="Leelawadee UI"/>
+        <a:font script="Bopo" typeface="Microsoft JhengHei"/>
+        <a:font script="Java" typeface="Javanese Text"/>
+        <a:font script="Lisu" typeface="Segoe UI"/>
+        <a:font script="Mymr" typeface="Myanmar Text"/>
+        <a:font script="Nkoo" typeface="Ebrima"/>
+        <a:font script="Olck" typeface="Nirmala UI"/>
+        <a:font script="Osma" typeface="Ebrima"/>
+        <a:font script="Phag" typeface="Phagspa"/>
+        <a:font script="Syrn" typeface="Estrangelo Edessa"/>
+        <a:font script="Syrj" typeface="Estrangelo Edessa"/>
+        <a:font script="Syre" typeface="Estrangelo Edessa"/>
+        <a:font script="Sora" typeface="Nirmala UI"/>
+        <a:font script="Tale" typeface="Microsoft Tai Le"/>
+        <a:font script="Talu" typeface="Microsoft New Tai Lue"/>
+        <a:font script="Tfng" typeface="Ebrima"/>
+      </a:minorFont>
+    </a:fontScheme>
+    <a:fmtScheme name="Office">
+      <a:fillStyleLst>
+        <a:solidFill>
+          <a:schemeClr val="phClr"/>
+        </a:solidFill>
+        <a:gradFill rotWithShape="1">
+          <a:gsLst>
+            <a:gs pos="0">
+              <a:schemeClr val="phClr">
+                <a:lumMod val="110000"/>
+                <a:satMod val="105000"/>
+                <a:tint val="67000"/>
+              </a:schemeClr>
+            </a:gs>
+            <a:gs pos="50000">
+              <a:schemeClr val="phClr">
+                <a:lumMod val="105000"/>
+                <a:satMod val="103000"/>
+                <a:tint val="73000"/>
+              </a:schemeClr>
+            </a:gs>
+            <a:gs pos="100000">
+              <a:schemeClr val="phClr">
+                <a:lumMod val="105000"/>
+                <a:satMod val="109000"/>
+                <a:tint val="81000"/>
+              </a:schemeClr>
+            </a:gs>
+          </a:gsLst>
+          <a:lin ang="5400000" scaled="0"/>
+        </a:gradFill>
+        <a:gradFill rotWithShape="1">
+          <a:gsLst>
+            <a:gs pos="0">
+              <a:schemeClr val="phClr">
+                <a:satMod val="103000"/>
+                <a:lumMod val="102000"/>
+                <a:tint val="94000"/>
+              </a:schemeClr>
+            </a:gs>
+            <a:gs pos="50000">
+              <a:schemeClr val="phClr">
+                <a:satMod val="110000"/>
+                <a:lumMod val="100000"/>
+                <a:shade val="100000"/>
+              </a:schemeClr>
+            </a:gs>
+            <a:gs pos="100000">
+              <a:schemeClr val="phClr">
+                <a:lumMod val="99000"/>
+                <a:satMod val="120000"/>
+                <a:shade val="78000"/>
+              </a:schemeClr>
+            </a:gs>
+          </a:gsLst>
+          <a:lin ang="5400000" scaled="0"/>
+        </a:gradFill>
+      </a:fillStyleLst>
+      <a:lnStyleLst>
+        <a:ln w="12700" cap="flat" cmpd="sng" algn="ctr">
+          <a:solidFill>
+            <a:schemeClr val="phClr"/>
+          </a:solidFill>
+          <a:prstDash val="solid"/>
+          <a:miter lim="800000"/>
+        </a:ln>
+        <a:ln w="19050" cap="flat" cmpd="sng" algn="ctr">
+          <a:solidFill>
+            <a:schemeClr val="phClr"/>
+          </a:solidFill>
+          <a:prstDash val="solid"/>
+          <a:miter lim="800000"/>
+        </a:ln>
+        <a:ln w="25400" cap="flat" cmpd="sng" algn="ctr">
+          <a:solidFill>
+            <a:schemeClr val="phClr"/>
+          </a:solidFill>
+          <a:prstDash val="solid"/>
+          <a:miter lim="800000"/>
+        </a:ln>
+      </a:lnStyleLst>
+      <a:effectStyleLst>
+        <a:effectStyle>
+          <a:effectLst/>
+        </a:effectStyle>
+        <a:effectStyle>
+          <a:effectLst/>
+        </a:effectStyle>
+        <a:effectStyle>
+          <a:effectLst>
+            <a:outerShdw blurRad="57150" dist="19050" dir="5400000" algn="ctr" rotWithShape="0">
+              <a:srgbClr val="000000">
+                <a:alpha val="63000"/>
+              </a:srgbClr>
+            </a:outerShdw>
+          </a:effectLst>
+        </a:effectStyle>
+      </a:effectStyleLst>
+      <a:bgFillStyleLst>
+        <a:solidFill>
+          <a:schemeClr val="phClr"/>
+        </a:solidFill>
+        <a:solidFill>
+          <a:schemeClr val="phClr">
+            <a:tint val="95000"/>
+            <a:satMod val="170000"/>
+          </a:schemeClr>
+        </a:solidFill>
+        <a:gradFill rotWithShape="1">
+          <a:gsLst>
+            <a:gs pos="0">
+              <a:schemeClr val="phClr">
+                <a:tint val="93000"/>
+                <a:satMod val="150000"/>
+                <a:shade val="98000"/>
+                <a:lumMod val="102000"/>
+              </a:schemeClr>
+            </a:gs>
+            <a:gs pos="50000">
+              <a:schemeClr val="phClr">
+                <a:tint val="98000"/>
+                <a:satMod val="130000"/>
+                <a:shade val="90000"/>
+                <a:lumMod val="103000"/>
+              </a:schemeClr>
+            </a:gs>
+            <a:gs pos="100000">
+              <a:schemeClr val="phClr">
+                <a:shade val="63000"/>
+                <a:satMod val="120000"/>
+              </a:schemeClr>
+            </a:gs>
+          </a:gsLst>
+          <a:lin ang="5400000" scaled="0"/>
+        </a:gradFill>
+      </a:bgFillStyleLst>
+    </a:fmtScheme>
+  </a:themeElements>
+  <a:objectDefaults>
+    <a:lnDef>
+      <a:spPr/>
+      <a:bodyPr/>
+      <a:lstStyle/>
+      <a:style>
+        <a:lnRef idx="2">
+          <a:schemeClr val="accent1"/>
+        </a:lnRef>
+        <a:fillRef idx="0">
+          <a:schemeClr val="accent1"/>
+        </a:fillRef>
+        <a:effectRef idx="1">
+          <a:schemeClr val="accent1"/>
+        </a:effectRef>
+        <a:fontRef idx="minor">
+          <a:schemeClr val="tx1"/>
+        </a:fontRef>
+      </a:style>
+    </a:lnDef>
+  </a:objectDefaults>
+  <a:extraClrSchemeLst/>
+  <a:extLst>
+    <a:ext uri="{05A4C25C-085E-4340-85A3-A5531E510DB2}">
+      <thm15:themeFamily xmlns:thm15="http://schemas.microsoft.com/office/thememl/2012/main" name="Office Theme" id="{2E142A2C-CD16-42D6-873A-C26D2A0506FA}" vid="{1BDDFF52-6CD6-40A5-AB3C-68EB2F1E4D0A}"/>
+    </a:ext>
+  </a:extLst>
+</a:theme>
 </file>